--- a/docs/slides/harness-flow.pptx
+++ b/docs/slides/harness-flow.pptx
@@ -7,7 +7,7 @@
   <p:sldIdLst>
     <p:sldId id="256" r:id="rId7"/>
   </p:sldIdLst>
-  <p:sldSz cx="12188952" cy="6858000" type="screen4x3"/>
+  <p:sldSz cx="12192000" cy="6858000" type="screen4x3"/>
   <p:notesSz cx="6858000" cy="9144000"/>
   <p:defaultTextStyle>
     <a:defPPr>
@@ -3097,7 +3097,7 @@
         <p:spPr>
           <a:xfrm>
             <a:off x="0" y="0"/>
-            <a:ext cx="12188952" cy="6858000"/>
+            <a:ext cx="12192000" cy="6858000"/>
           </a:xfrm>
           <a:prstGeom prst="rect">
             <a:avLst/>
@@ -3140,8 +3140,8 @@
         </p:nvSpPr>
         <p:spPr>
           <a:xfrm>
-            <a:off x="438912" y="237744"/>
-            <a:ext cx="8229600" cy="438912"/>
+            <a:off x="310896" y="109728"/>
+            <a:ext cx="8229600" cy="329184"/>
           </a:xfrm>
           <a:prstGeom prst="rect">
             <a:avLst/>
@@ -3160,13 +3160,13 @@
               </a:lnSpc>
             </a:pPr>
             <a:r>
-              <a:rPr sz="3000" b="1" i="0" spc="-30">
+              <a:rPr sz="2600" b="1" i="0" spc="20">
                 <a:solidFill>
                   <a:srgbClr val="1A1E2C"/>
                 </a:solidFill>
                 <a:latin typeface="Segoe UI"/>
               </a:rPr>
-              <a:t>One goal, eight engines</a:t>
+              <a:t>ONE GOAL, EIGHT ENGINES</a:t>
             </a:r>
           </a:p>
         </p:txBody>
@@ -3179,8 +3179,8 @@
         </p:nvSpPr>
         <p:spPr>
           <a:xfrm>
-            <a:off x="438912" y="731520"/>
-            <a:ext cx="10058400" cy="237744"/>
+            <a:off x="310896" y="457200"/>
+            <a:ext cx="10058400" cy="182880"/>
           </a:xfrm>
           <a:prstGeom prst="rect">
             <a:avLst/>
@@ -3199,13 +3199,13 @@
               </a:lnSpc>
             </a:pPr>
             <a:r>
-              <a:rPr sz="1300" b="0" i="0">
+              <a:rPr sz="1200" b="0" i="0">
                 <a:solidFill>
                   <a:srgbClr val="5C6377"/>
                 </a:solidFill>
                 <a:latin typeface="Segoe UI"/>
               </a:rPr>
-              <a:t>"Plan my weekly meal." — what the Family Hub does with a sentence</a:t>
+              <a:t>What the Family Hub does with a sentence</a:t>
             </a:r>
           </a:p>
         </p:txBody>
@@ -3218,8 +3218,8 @@
         </p:nvSpPr>
         <p:spPr>
           <a:xfrm>
-            <a:off x="438912" y="1115568"/>
-            <a:ext cx="2286000" cy="512064"/>
+            <a:off x="310896" y="676656"/>
+            <a:ext cx="4937760" cy="384048"/>
           </a:xfrm>
           <a:prstGeom prst="roundRect">
             <a:avLst>
@@ -3266,8 +3266,8 @@
         </p:nvSpPr>
         <p:spPr>
           <a:xfrm>
-            <a:off x="585216" y="1115568"/>
-            <a:ext cx="1993392" cy="512064"/>
+            <a:off x="475488" y="676656"/>
+            <a:ext cx="4608576" cy="384048"/>
           </a:xfrm>
           <a:prstGeom prst="rect">
             <a:avLst/>
@@ -3286,13 +3286,13 @@
               </a:lnSpc>
             </a:pPr>
             <a:r>
-              <a:rPr sz="1300" b="0" i="1">
+              <a:rPr sz="1100" b="0" i="1">
                 <a:solidFill>
                   <a:srgbClr val="1A1E2C"/>
                 </a:solidFill>
                 <a:latin typeface="Segoe UI"/>
               </a:rPr>
-              <a:t>"Plan my weekly meal."</a:t>
+              <a:t>"Help the family eat healthier next week, and cut food waste."</a:t>
             </a:r>
           </a:p>
         </p:txBody>
@@ -3305,8 +3305,8 @@
         </p:nvSpPr>
         <p:spPr>
           <a:xfrm>
-            <a:off x="2816352" y="1307592"/>
-            <a:ext cx="365760" cy="128016"/>
+            <a:off x="5321808" y="804672"/>
+            <a:ext cx="256032" cy="128016"/>
           </a:xfrm>
           <a:custGeom>
             <a:avLst/>
@@ -3315,24 +3315,24 @@
             <a:cxnLst/>
             <a:rect l="l" t="t" r="r" b="b"/>
             <a:pathLst>
-              <a:path w="365760" h="128016">
+              <a:path w="256032" h="128016">
                 <a:moveTo>
                   <a:pt x="0" y="45720"/>
                 </a:moveTo>
                 <a:lnTo>
-                  <a:pt x="265176" y="45720"/>
-                </a:lnTo>
-                <a:lnTo>
-                  <a:pt x="265176" y="0"/>
-                </a:lnTo>
-                <a:lnTo>
-                  <a:pt x="365760" y="64008"/>
-                </a:lnTo>
-                <a:lnTo>
-                  <a:pt x="265176" y="128016"/>
-                </a:lnTo>
-                <a:lnTo>
-                  <a:pt x="265176" y="82296"/>
+                  <a:pt x="155448" y="45720"/>
+                </a:lnTo>
+                <a:lnTo>
+                  <a:pt x="155448" y="0"/>
+                </a:lnTo>
+                <a:lnTo>
+                  <a:pt x="256032" y="64008"/>
+                </a:lnTo>
+                <a:lnTo>
+                  <a:pt x="155448" y="128016"/>
+                </a:lnTo>
+                <a:lnTo>
+                  <a:pt x="155448" y="82296"/>
                 </a:lnTo>
                 <a:lnTo>
                   <a:pt x="0" y="82296"/>
@@ -3379,8 +3379,8 @@
         </p:nvSpPr>
         <p:spPr>
           <a:xfrm>
-            <a:off x="3273552" y="1115568"/>
-            <a:ext cx="3017520" cy="512064"/>
+            <a:off x="5650992" y="676656"/>
+            <a:ext cx="2743200" cy="384048"/>
           </a:xfrm>
           <a:prstGeom prst="roundRect">
             <a:avLst>
@@ -3427,7 +3427,7 @@
         </p:nvSpPr>
         <p:spPr>
           <a:xfrm>
-            <a:off x="3534156" y="1243584"/>
+            <a:off x="5893308" y="740664"/>
             <a:ext cx="100584" cy="100584"/>
           </a:xfrm>
           <a:prstGeom prst="ellipse">
@@ -3471,7 +3471,7 @@
         </p:nvSpPr>
         <p:spPr>
           <a:xfrm>
-            <a:off x="3493008" y="1380744"/>
+            <a:off x="5852160" y="877824"/>
             <a:ext cx="182880" cy="91440"/>
           </a:xfrm>
           <a:custGeom>
@@ -3575,8 +3575,8 @@
         </p:nvSpPr>
         <p:spPr>
           <a:xfrm>
-            <a:off x="3785616" y="1115568"/>
-            <a:ext cx="2359152" cy="512064"/>
+            <a:off x="6144768" y="676656"/>
+            <a:ext cx="2121408" cy="384048"/>
           </a:xfrm>
           <a:prstGeom prst="rect">
             <a:avLst/>
@@ -3595,7 +3595,7 @@
               </a:lnSpc>
             </a:pPr>
             <a:r>
-              <a:rPr sz="1300" b="1" i="0">
+              <a:rPr sz="1200" b="1" i="0">
                 <a:solidFill>
                   <a:srgbClr val="1A1E2C"/>
                 </a:solidFill>
@@ -3611,7 +3611,7 @@
               </a:lnSpc>
             </a:pPr>
             <a:r>
-              <a:rPr sz="1050" b="0" i="0">
+              <a:rPr sz="1000" b="0" i="0">
                 <a:solidFill>
                   <a:srgbClr val="5C6377"/>
                 </a:solidFill>
@@ -3630,8 +3630,8 @@
         </p:nvCxnSpPr>
         <p:spPr>
           <a:xfrm>
-            <a:off x="4782312" y="1636776"/>
-            <a:ext cx="0" cy="201168"/>
+            <a:off x="7022592" y="1069848"/>
+            <a:ext cx="0" cy="128016"/>
           </a:xfrm>
           <a:prstGeom prst="line">
             <a:avLst/>
@@ -3666,8 +3666,8 @@
         </p:nvCxnSpPr>
         <p:spPr>
           <a:xfrm flipH="1">
-            <a:off x="1755648" y="1837944"/>
-            <a:ext cx="3036722" cy="0"/>
+            <a:off x="2139696" y="1197864"/>
+            <a:ext cx="4892954" cy="0"/>
           </a:xfrm>
           <a:prstGeom prst="line">
             <a:avLst/>
@@ -3702,8 +3702,8 @@
         </p:nvSpPr>
         <p:spPr>
           <a:xfrm>
-            <a:off x="1691640" y="1828800"/>
-            <a:ext cx="128016" cy="192024"/>
+            <a:off x="2075688" y="1188720"/>
+            <a:ext cx="128016" cy="137160"/>
           </a:xfrm>
           <a:custGeom>
             <a:avLst/>
@@ -3712,24 +3712,24 @@
             <a:cxnLst/>
             <a:rect l="l" t="t" r="r" b="b"/>
             <a:pathLst>
-              <a:path w="128016" h="192024">
+              <a:path w="128016" h="137160">
                 <a:moveTo>
                   <a:pt x="45720" y="0"/>
                 </a:moveTo>
                 <a:lnTo>
-                  <a:pt x="45720" y="91440"/>
-                </a:lnTo>
-                <a:lnTo>
-                  <a:pt x="0" y="91440"/>
-                </a:lnTo>
-                <a:lnTo>
-                  <a:pt x="64008" y="192024"/>
-                </a:lnTo>
-                <a:lnTo>
-                  <a:pt x="128016" y="91440"/>
-                </a:lnTo>
-                <a:lnTo>
-                  <a:pt x="82296" y="91440"/>
+                  <a:pt x="45720" y="36576"/>
+                </a:lnTo>
+                <a:lnTo>
+                  <a:pt x="0" y="36576"/>
+                </a:lnTo>
+                <a:lnTo>
+                  <a:pt x="64008" y="137160"/>
+                </a:lnTo>
+                <a:lnTo>
+                  <a:pt x="128016" y="36576"/>
+                </a:lnTo>
+                <a:lnTo>
+                  <a:pt x="82296" y="36576"/>
                 </a:lnTo>
                 <a:lnTo>
                   <a:pt x="82296" y="0"/>
@@ -3776,12 +3776,12 @@
         </p:nvSpPr>
         <p:spPr>
           <a:xfrm>
-            <a:off x="438912" y="2048256"/>
-            <a:ext cx="2633472" cy="1700784"/>
+            <a:off x="310896" y="1353312"/>
+            <a:ext cx="3657600" cy="1591056"/>
           </a:xfrm>
           <a:prstGeom prst="roundRect">
             <a:avLst>
-              <a:gd name="adj" fmla="val 5376"/>
+              <a:gd name="adj" fmla="val 5747"/>
             </a:avLst>
           </a:prstGeom>
           <a:solidFill>
@@ -3822,8 +3822,8 @@
         </p:nvSpPr>
         <p:spPr>
           <a:xfrm>
-            <a:off x="603504" y="2203704"/>
-            <a:ext cx="256032" cy="256032"/>
+            <a:off x="457200" y="1463040"/>
+            <a:ext cx="237744" cy="237744"/>
           </a:xfrm>
           <a:prstGeom prst="ellipse">
             <a:avLst/>
@@ -3866,8 +3866,8 @@
         </p:nvSpPr>
         <p:spPr>
           <a:xfrm>
-            <a:off x="603504" y="2203704"/>
-            <a:ext cx="256032" cy="256032"/>
+            <a:off x="457200" y="1463040"/>
+            <a:ext cx="237744" cy="237744"/>
           </a:xfrm>
           <a:prstGeom prst="rect">
             <a:avLst/>
@@ -3905,8 +3905,8 @@
         </p:nvSpPr>
         <p:spPr>
           <a:xfrm>
-            <a:off x="969264" y="2185416"/>
-            <a:ext cx="1975104" cy="292608"/>
+            <a:off x="786384" y="1463040"/>
+            <a:ext cx="3035808" cy="237744"/>
           </a:xfrm>
           <a:prstGeom prst="rect">
             <a:avLst/>
@@ -3925,13 +3925,13 @@
               </a:lnSpc>
             </a:pPr>
             <a:r>
-              <a:rPr sz="1300" b="1" i="0">
+              <a:rPr sz="1250" b="1" i="0">
                 <a:solidFill>
                   <a:srgbClr val="1A1E2C"/>
                 </a:solidFill>
                 <a:latin typeface="Segoe UI"/>
               </a:rPr>
-              <a:t>Pre-Check Engine</a:t>
+              <a:t>Pre-check Engine</a:t>
             </a:r>
           </a:p>
         </p:txBody>
@@ -3944,8 +3944,8 @@
         </p:nvSpPr>
         <p:spPr>
           <a:xfrm>
-            <a:off x="603504" y="2542032"/>
-            <a:ext cx="2304288" cy="365760"/>
+            <a:off x="457200" y="1755648"/>
+            <a:ext cx="3364992" cy="310896"/>
           </a:xfrm>
           <a:prstGeom prst="rect">
             <a:avLst/>
@@ -3964,67 +3964,31 @@
               </a:lnSpc>
             </a:pPr>
             <a:r>
-              <a:rPr sz="1100" b="0" i="0">
+              <a:rPr sz="1050" b="0" i="0">
                 <a:solidFill>
                   <a:srgbClr val="5C6377"/>
                 </a:solidFill>
                 <a:latin typeface="Segoe UI"/>
               </a:rPr>
-              <a:t>Is the kitchen ready to be asked?</a:t>
-            </a:r>
-          </a:p>
-        </p:txBody>
-      </p:sp>
-      <p:cxnSp>
-        <p:nvCxnSpPr>
-          <p:cNvPr id="20" name="Connector 19"/>
-          <p:cNvCxnSpPr/>
-          <p:nvPr/>
-        </p:nvCxnSpPr>
-        <p:spPr>
-          <a:xfrm>
-            <a:off x="603504" y="2935224"/>
-            <a:ext cx="2304288" cy="0"/>
-          </a:xfrm>
-          <a:prstGeom prst="line">
-            <a:avLst/>
-          </a:prstGeom>
-          <a:ln w="12700">
-            <a:solidFill>
-              <a:srgbClr val="E2E6F0"/>
-            </a:solidFill>
-          </a:ln>
-          <a:effectLst/>
-        </p:spPr>
-        <p:style>
-          <a:lnRef idx="2">
-            <a:schemeClr val="accent1"/>
-          </a:lnRef>
-          <a:fillRef idx="0">
-            <a:schemeClr val="accent1"/>
-          </a:fillRef>
-          <a:effectRef idx="1">
-            <a:schemeClr val="accent1"/>
-          </a:effectRef>
-          <a:fontRef idx="minor">
-            <a:schemeClr val="tx1"/>
-          </a:fontRef>
-        </p:style>
-      </p:cxnSp>
-      <p:sp>
-        <p:nvSpPr>
-          <p:cNvPr id="21" name="Rounded Rectangle 20"/>
+              <a:t>Make sure things work before it starts.</a:t>
+            </a:r>
+          </a:p>
+        </p:txBody>
+      </p:sp>
+      <p:sp>
+        <p:nvSpPr>
+          <p:cNvPr id="20" name="Rounded Rectangle 19"/>
           <p:cNvSpPr/>
           <p:nvPr/>
         </p:nvSpPr>
         <p:spPr>
           <a:xfrm>
-            <a:off x="603504" y="3017520"/>
-            <a:ext cx="2304288" cy="603504"/>
+            <a:off x="420624" y="2103120"/>
+            <a:ext cx="3438144" cy="365760"/>
           </a:xfrm>
           <a:prstGeom prst="roundRect">
             <a:avLst>
-              <a:gd name="adj" fmla="val 12121"/>
+              <a:gd name="adj" fmla="val 20000"/>
             </a:avLst>
           </a:prstGeom>
           <a:solidFill>
@@ -4059,14 +4023,14 @@
       </p:sp>
       <p:sp>
         <p:nvSpPr>
-          <p:cNvPr id="22" name="TextBox 21"/>
+          <p:cNvPr id="21" name="TextBox 20"/>
           <p:cNvSpPr txBox="1"/>
           <p:nvPr/>
         </p:nvSpPr>
         <p:spPr>
           <a:xfrm>
-            <a:off x="694944" y="3090672"/>
-            <a:ext cx="146304" cy="164592"/>
+            <a:off x="512064" y="2103120"/>
+            <a:ext cx="128016" cy="365760"/>
           </a:xfrm>
           <a:prstGeom prst="rect">
             <a:avLst/>
@@ -4074,7 +4038,7 @@
           <a:noFill/>
         </p:spPr>
         <p:txBody>
-          <a:bodyPr wrap="square" lIns="0" rIns="0" tIns="0" bIns="0" anchor="t">
+          <a:bodyPr wrap="square" lIns="0" rIns="0" tIns="0" bIns="0" anchor="ctr">
             <a:spAutoFit/>
           </a:bodyPr>
           <a:lstStyle/>
@@ -4085,7 +4049,7 @@
               </a:lnSpc>
             </a:pPr>
             <a:r>
-              <a:rPr sz="1050" b="1" i="0">
+              <a:rPr sz="950" b="1" i="0">
                 <a:solidFill>
                   <a:srgbClr val="12A150"/>
                 </a:solidFill>
@@ -4098,14 +4062,14 @@
       </p:sp>
       <p:sp>
         <p:nvSpPr>
-          <p:cNvPr id="23" name="TextBox 22"/>
+          <p:cNvPr id="22" name="TextBox 21"/>
           <p:cNvSpPr txBox="1"/>
           <p:nvPr/>
         </p:nvSpPr>
         <p:spPr>
           <a:xfrm>
-            <a:off x="859536" y="3090672"/>
-            <a:ext cx="1956816" cy="493776"/>
+            <a:off x="676656" y="2103120"/>
+            <a:ext cx="3090672" cy="365760"/>
           </a:xfrm>
           <a:prstGeom prst="rect">
             <a:avLst/>
@@ -4113,38 +4077,162 @@
           <a:noFill/>
         </p:spPr>
         <p:txBody>
-          <a:bodyPr wrap="square" lIns="0" rIns="0" tIns="0" bIns="0" anchor="t">
+          <a:bodyPr wrap="square" lIns="0" rIns="0" tIns="0" bIns="0" anchor="ctr">
             <a:spAutoFit/>
           </a:bodyPr>
           <a:lstStyle/>
           <a:p>
             <a:pPr algn="l">
               <a:lnSpc>
-                <a:spcPct val="118000"/>
+                <a:spcPct val="115000"/>
               </a:lnSpc>
             </a:pPr>
             <a:r>
-              <a:rPr sz="1050" b="0" i="0">
+              <a:rPr sz="950" b="0" i="0">
                 <a:solidFill>
                   <a:srgbClr val="1A1E2C"/>
                 </a:solidFill>
                 <a:latin typeface="Segoe UI"/>
               </a:rPr>
-              <a:t>The fridge was online and signed in, so it went ahead.</a:t>
-            </a:r>
-          </a:p>
-        </p:txBody>
-      </p:sp>
-      <p:sp>
-        <p:nvSpPr>
-          <p:cNvPr id="24" name="Freeform 23"/>
+              <a:t>The fridge is online and the account is signed in.</a:t>
+            </a:r>
+          </a:p>
+        </p:txBody>
+      </p:sp>
+      <p:sp>
+        <p:nvSpPr>
+          <p:cNvPr id="23" name="Rounded Rectangle 22"/>
           <p:cNvSpPr/>
           <p:nvPr/>
         </p:nvSpPr>
         <p:spPr>
           <a:xfrm>
-            <a:off x="3108960" y="2834640"/>
-            <a:ext cx="185928" cy="128016"/>
+            <a:off x="420624" y="2514600"/>
+            <a:ext cx="3438144" cy="365760"/>
+          </a:xfrm>
+          <a:prstGeom prst="roundRect">
+            <a:avLst>
+              <a:gd name="adj" fmla="val 20000"/>
+            </a:avLst>
+          </a:prstGeom>
+          <a:solidFill>
+            <a:srgbClr val="E7F7EE"/>
+          </a:solidFill>
+          <a:ln>
+            <a:noFill/>
+          </a:ln>
+          <a:effectLst/>
+        </p:spPr>
+        <p:style>
+          <a:lnRef idx="1">
+            <a:schemeClr val="accent1"/>
+          </a:lnRef>
+          <a:fillRef idx="3">
+            <a:schemeClr val="accent1"/>
+          </a:fillRef>
+          <a:effectRef idx="2">
+            <a:schemeClr val="accent1"/>
+          </a:effectRef>
+          <a:fontRef idx="minor">
+            <a:schemeClr val="lt1"/>
+          </a:fontRef>
+        </p:style>
+        <p:txBody>
+          <a:bodyPr rtlCol="0" anchor="ctr"/>
+          <a:lstStyle/>
+          <a:p>
+            <a:pPr algn="ctr"/>
+          </a:p>
+        </p:txBody>
+      </p:sp>
+      <p:sp>
+        <p:nvSpPr>
+          <p:cNvPr id="24" name="TextBox 23"/>
+          <p:cNvSpPr txBox="1"/>
+          <p:nvPr/>
+        </p:nvSpPr>
+        <p:spPr>
+          <a:xfrm>
+            <a:off x="512064" y="2514600"/>
+            <a:ext cx="128016" cy="365760"/>
+          </a:xfrm>
+          <a:prstGeom prst="rect">
+            <a:avLst/>
+          </a:prstGeom>
+          <a:noFill/>
+        </p:spPr>
+        <p:txBody>
+          <a:bodyPr wrap="square" lIns="0" rIns="0" tIns="0" bIns="0" anchor="ctr">
+            <a:spAutoFit/>
+          </a:bodyPr>
+          <a:lstStyle/>
+          <a:p>
+            <a:pPr algn="l">
+              <a:lnSpc>
+                <a:spcPct val="112000"/>
+              </a:lnSpc>
+            </a:pPr>
+            <a:r>
+              <a:rPr sz="950" b="1" i="0">
+                <a:solidFill>
+                  <a:srgbClr val="12A150"/>
+                </a:solidFill>
+                <a:latin typeface="Segoe UI"/>
+              </a:rPr>
+              <a:t>✓</a:t>
+            </a:r>
+          </a:p>
+        </p:txBody>
+      </p:sp>
+      <p:sp>
+        <p:nvSpPr>
+          <p:cNvPr id="25" name="TextBox 24"/>
+          <p:cNvSpPr txBox="1"/>
+          <p:nvPr/>
+        </p:nvSpPr>
+        <p:spPr>
+          <a:xfrm>
+            <a:off x="676656" y="2514600"/>
+            <a:ext cx="3090672" cy="365760"/>
+          </a:xfrm>
+          <a:prstGeom prst="rect">
+            <a:avLst/>
+          </a:prstGeom>
+          <a:noFill/>
+        </p:spPr>
+        <p:txBody>
+          <a:bodyPr wrap="square" lIns="0" rIns="0" tIns="0" bIns="0" anchor="ctr">
+            <a:spAutoFit/>
+          </a:bodyPr>
+          <a:lstStyle/>
+          <a:p>
+            <a:pPr algn="l">
+              <a:lnSpc>
+                <a:spcPct val="115000"/>
+              </a:lnSpc>
+            </a:pPr>
+            <a:r>
+              <a:rPr sz="950" b="0" i="0">
+                <a:solidFill>
+                  <a:srgbClr val="1A1E2C"/>
+                </a:solidFill>
+                <a:latin typeface="Segoe UI"/>
+              </a:rPr>
+              <a:t>If it weren't, it stops here — before writing a plan nobody could use.</a:t>
+            </a:r>
+          </a:p>
+        </p:txBody>
+      </p:sp>
+      <p:sp>
+        <p:nvSpPr>
+          <p:cNvPr id="26" name="Freeform 25"/>
+          <p:cNvSpPr/>
+          <p:nvPr/>
+        </p:nvSpPr>
+        <p:spPr>
+          <a:xfrm>
+            <a:off x="4005072" y="2084832"/>
+            <a:ext cx="219456" cy="128016"/>
           </a:xfrm>
           <a:custGeom>
             <a:avLst/>
@@ -4153,24 +4241,24 @@
             <a:cxnLst/>
             <a:rect l="l" t="t" r="r" b="b"/>
             <a:pathLst>
-              <a:path w="185928" h="128016">
+              <a:path w="219456" h="128016">
                 <a:moveTo>
                   <a:pt x="0" y="45720"/>
                 </a:moveTo>
                 <a:lnTo>
-                  <a:pt x="85344" y="45720"/>
-                </a:lnTo>
-                <a:lnTo>
-                  <a:pt x="85344" y="0"/>
-                </a:lnTo>
-                <a:lnTo>
-                  <a:pt x="185928" y="64008"/>
-                </a:lnTo>
-                <a:lnTo>
-                  <a:pt x="85344" y="128016"/>
-                </a:lnTo>
-                <a:lnTo>
-                  <a:pt x="85344" y="82296"/>
+                  <a:pt x="118872" y="45720"/>
+                </a:lnTo>
+                <a:lnTo>
+                  <a:pt x="118872" y="0"/>
+                </a:lnTo>
+                <a:lnTo>
+                  <a:pt x="219456" y="64008"/>
+                </a:lnTo>
+                <a:lnTo>
+                  <a:pt x="118872" y="128016"/>
+                </a:lnTo>
+                <a:lnTo>
+                  <a:pt x="118872" y="82296"/>
                 </a:lnTo>
                 <a:lnTo>
                   <a:pt x="0" y="82296"/>
@@ -4211,18 +4299,18 @@
       </p:sp>
       <p:sp>
         <p:nvSpPr>
-          <p:cNvPr id="25" name="Rounded Rectangle 24"/>
+          <p:cNvPr id="27" name="Rounded Rectangle 26"/>
           <p:cNvSpPr/>
           <p:nvPr/>
         </p:nvSpPr>
         <p:spPr>
           <a:xfrm>
-            <a:off x="3331464" y="2048256"/>
-            <a:ext cx="2633472" cy="1700784"/>
+            <a:off x="4261104" y="1353312"/>
+            <a:ext cx="3657600" cy="1591056"/>
           </a:xfrm>
           <a:prstGeom prst="roundRect">
             <a:avLst>
-              <a:gd name="adj" fmla="val 5376"/>
+              <a:gd name="adj" fmla="val 5747"/>
             </a:avLst>
           </a:prstGeom>
           <a:solidFill>
@@ -4257,14 +4345,14 @@
       </p:sp>
       <p:sp>
         <p:nvSpPr>
-          <p:cNvPr id="26" name="Oval 25"/>
+          <p:cNvPr id="28" name="Oval 27"/>
           <p:cNvSpPr/>
           <p:nvPr/>
         </p:nvSpPr>
         <p:spPr>
           <a:xfrm>
-            <a:off x="3496056" y="2203704"/>
-            <a:ext cx="256032" cy="256032"/>
+            <a:off x="4407408" y="1463040"/>
+            <a:ext cx="237744" cy="237744"/>
           </a:xfrm>
           <a:prstGeom prst="ellipse">
             <a:avLst/>
@@ -4301,14 +4389,14 @@
       </p:sp>
       <p:sp>
         <p:nvSpPr>
-          <p:cNvPr id="27" name="TextBox 26"/>
+          <p:cNvPr id="29" name="TextBox 28"/>
           <p:cNvSpPr txBox="1"/>
           <p:nvPr/>
         </p:nvSpPr>
         <p:spPr>
           <a:xfrm>
-            <a:off x="3496056" y="2203704"/>
-            <a:ext cx="256032" cy="256032"/>
+            <a:off x="4407408" y="1463040"/>
+            <a:ext cx="237744" cy="237744"/>
           </a:xfrm>
           <a:prstGeom prst="rect">
             <a:avLst/>
@@ -4340,14 +4428,14 @@
       </p:sp>
       <p:sp>
         <p:nvSpPr>
-          <p:cNvPr id="28" name="TextBox 27"/>
+          <p:cNvPr id="30" name="TextBox 29"/>
           <p:cNvSpPr txBox="1"/>
           <p:nvPr/>
         </p:nvSpPr>
         <p:spPr>
           <a:xfrm>
-            <a:off x="3861816" y="2185416"/>
-            <a:ext cx="1975104" cy="292608"/>
+            <a:off x="4736592" y="1463040"/>
+            <a:ext cx="3035808" cy="237744"/>
           </a:xfrm>
           <a:prstGeom prst="rect">
             <a:avLst/>
@@ -4366,7 +4454,7 @@
               </a:lnSpc>
             </a:pPr>
             <a:r>
-              <a:rPr sz="1300" b="1" i="0">
+              <a:rPr sz="1250" b="1" i="0">
                 <a:solidFill>
                   <a:srgbClr val="1A1E2C"/>
                 </a:solidFill>
@@ -4379,14 +4467,14 @@
       </p:sp>
       <p:sp>
         <p:nvSpPr>
-          <p:cNvPr id="29" name="TextBox 28"/>
+          <p:cNvPr id="31" name="TextBox 30"/>
           <p:cNvSpPr txBox="1"/>
           <p:nvPr/>
         </p:nvSpPr>
         <p:spPr>
           <a:xfrm>
-            <a:off x="3496056" y="2542032"/>
-            <a:ext cx="2304288" cy="365760"/>
+            <a:off x="4407408" y="1755648"/>
+            <a:ext cx="3364992" cy="310896"/>
           </a:xfrm>
           <a:prstGeom prst="rect">
             <a:avLst/>
@@ -4405,67 +4493,31 @@
               </a:lnSpc>
             </a:pPr>
             <a:r>
-              <a:rPr sz="1100" b="0" i="0">
+              <a:rPr sz="1050" b="0" i="0">
                 <a:solidFill>
                   <a:srgbClr val="5C6377"/>
                 </a:solidFill>
                 <a:latin typeface="Segoe UI"/>
               </a:rPr>
-              <a:t>What is this fridge allowed to do?</a:t>
-            </a:r>
-          </a:p>
-        </p:txBody>
-      </p:sp>
-      <p:cxnSp>
-        <p:nvCxnSpPr>
-          <p:cNvPr id="30" name="Connector 29"/>
-          <p:cNvCxnSpPr/>
-          <p:nvPr/>
-        </p:nvCxnSpPr>
-        <p:spPr>
-          <a:xfrm>
-            <a:off x="3496056" y="2935224"/>
-            <a:ext cx="2304288" cy="0"/>
-          </a:xfrm>
-          <a:prstGeom prst="line">
-            <a:avLst/>
-          </a:prstGeom>
-          <a:ln w="12700">
-            <a:solidFill>
-              <a:srgbClr val="E2E6F0"/>
-            </a:solidFill>
-          </a:ln>
-          <a:effectLst/>
-        </p:spPr>
-        <p:style>
-          <a:lnRef idx="2">
-            <a:schemeClr val="accent1"/>
-          </a:lnRef>
-          <a:fillRef idx="0">
-            <a:schemeClr val="accent1"/>
-          </a:fillRef>
-          <a:effectRef idx="1">
-            <a:schemeClr val="accent1"/>
-          </a:effectRef>
-          <a:fontRef idx="minor">
-            <a:schemeClr val="tx1"/>
-          </a:fontRef>
-        </p:style>
-      </p:cxnSp>
-      <p:sp>
-        <p:nvSpPr>
-          <p:cNvPr id="31" name="Rounded Rectangle 30"/>
+              <a:t>Know what the fridge can do.</a:t>
+            </a:r>
+          </a:p>
+        </p:txBody>
+      </p:sp>
+      <p:sp>
+        <p:nvSpPr>
+          <p:cNvPr id="32" name="Rounded Rectangle 31"/>
           <p:cNvSpPr/>
           <p:nvPr/>
         </p:nvSpPr>
         <p:spPr>
           <a:xfrm>
-            <a:off x="3496056" y="3017520"/>
-            <a:ext cx="2304288" cy="603504"/>
+            <a:off x="4370832" y="2103120"/>
+            <a:ext cx="3438144" cy="365760"/>
           </a:xfrm>
           <a:prstGeom prst="roundRect">
             <a:avLst>
-              <a:gd name="adj" fmla="val 12121"/>
+              <a:gd name="adj" fmla="val 20000"/>
             </a:avLst>
           </a:prstGeom>
           <a:solidFill>
@@ -4500,14 +4552,14 @@
       </p:sp>
       <p:sp>
         <p:nvSpPr>
-          <p:cNvPr id="32" name="TextBox 31"/>
+          <p:cNvPr id="33" name="TextBox 32"/>
           <p:cNvSpPr txBox="1"/>
           <p:nvPr/>
         </p:nvSpPr>
         <p:spPr>
           <a:xfrm>
-            <a:off x="3587496" y="3090672"/>
-            <a:ext cx="146304" cy="164592"/>
+            <a:off x="4462272" y="2103120"/>
+            <a:ext cx="128016" cy="365760"/>
           </a:xfrm>
           <a:prstGeom prst="rect">
             <a:avLst/>
@@ -4515,7 +4567,7 @@
           <a:noFill/>
         </p:spPr>
         <p:txBody>
-          <a:bodyPr wrap="square" lIns="0" rIns="0" tIns="0" bIns="0" anchor="t">
+          <a:bodyPr wrap="square" lIns="0" rIns="0" tIns="0" bIns="0" anchor="ctr">
             <a:spAutoFit/>
           </a:bodyPr>
           <a:lstStyle/>
@@ -4526,7 +4578,7 @@
               </a:lnSpc>
             </a:pPr>
             <a:r>
-              <a:rPr sz="1050" b="1" i="0">
+              <a:rPr sz="950" b="1" i="0">
                 <a:solidFill>
                   <a:srgbClr val="12A150"/>
                 </a:solidFill>
@@ -4539,14 +4591,14 @@
       </p:sp>
       <p:sp>
         <p:nvSpPr>
-          <p:cNvPr id="33" name="TextBox 32"/>
+          <p:cNvPr id="34" name="TextBox 33"/>
           <p:cNvSpPr txBox="1"/>
           <p:nvPr/>
         </p:nvSpPr>
         <p:spPr>
           <a:xfrm>
-            <a:off x="3752088" y="3090672"/>
-            <a:ext cx="1956816" cy="493776"/>
+            <a:off x="4626864" y="2103120"/>
+            <a:ext cx="3090672" cy="365760"/>
           </a:xfrm>
           <a:prstGeom prst="rect">
             <a:avLst/>
@@ -4554,38 +4606,162 @@
           <a:noFill/>
         </p:spPr>
         <p:txBody>
-          <a:bodyPr wrap="square" lIns="0" rIns="0" tIns="0" bIns="0" anchor="t">
+          <a:bodyPr wrap="square" lIns="0" rIns="0" tIns="0" bIns="0" anchor="ctr">
             <a:spAutoFit/>
           </a:bodyPr>
           <a:lstStyle/>
           <a:p>
             <a:pPr algn="l">
               <a:lnSpc>
-                <a:spcPct val="118000"/>
+                <a:spcPct val="115000"/>
               </a:lnSpc>
             </a:pPr>
             <a:r>
-              <a:rPr sz="1050" b="0" i="0">
+              <a:rPr sz="950" b="0" i="0">
                 <a:solidFill>
                   <a:srgbClr val="1A1E2C"/>
                 </a:solidFill>
                 <a:latin typeface="Segoe UI"/>
               </a:rPr>
-              <a:t>It could read the fridge, the calendar, the recipe book and the family's activity.</a:t>
-            </a:r>
-          </a:p>
-        </p:txBody>
-      </p:sp>
-      <p:sp>
-        <p:nvSpPr>
-          <p:cNvPr id="34" name="Freeform 33"/>
+              <a:t>Picks what this goal needs: food, recipes, activity, shopping.</a:t>
+            </a:r>
+          </a:p>
+        </p:txBody>
+      </p:sp>
+      <p:sp>
+        <p:nvSpPr>
+          <p:cNvPr id="35" name="Rounded Rectangle 34"/>
           <p:cNvSpPr/>
           <p:nvPr/>
         </p:nvSpPr>
         <p:spPr>
           <a:xfrm>
-            <a:off x="6001512" y="2834640"/>
-            <a:ext cx="185928" cy="128016"/>
+            <a:off x="4370832" y="2514600"/>
+            <a:ext cx="3438144" cy="365760"/>
+          </a:xfrm>
+          <a:prstGeom prst="roundRect">
+            <a:avLst>
+              <a:gd name="adj" fmla="val 20000"/>
+            </a:avLst>
+          </a:prstGeom>
+          <a:solidFill>
+            <a:srgbClr val="E7F7EE"/>
+          </a:solidFill>
+          <a:ln>
+            <a:noFill/>
+          </a:ln>
+          <a:effectLst/>
+        </p:spPr>
+        <p:style>
+          <a:lnRef idx="1">
+            <a:schemeClr val="accent1"/>
+          </a:lnRef>
+          <a:fillRef idx="3">
+            <a:schemeClr val="accent1"/>
+          </a:fillRef>
+          <a:effectRef idx="2">
+            <a:schemeClr val="accent1"/>
+          </a:effectRef>
+          <a:fontRef idx="minor">
+            <a:schemeClr val="lt1"/>
+          </a:fontRef>
+        </p:style>
+        <p:txBody>
+          <a:bodyPr rtlCol="0" anchor="ctr"/>
+          <a:lstStyle/>
+          <a:p>
+            <a:pPr algn="ctr"/>
+          </a:p>
+        </p:txBody>
+      </p:sp>
+      <p:sp>
+        <p:nvSpPr>
+          <p:cNvPr id="36" name="TextBox 35"/>
+          <p:cNvSpPr txBox="1"/>
+          <p:nvPr/>
+        </p:nvSpPr>
+        <p:spPr>
+          <a:xfrm>
+            <a:off x="4462272" y="2514600"/>
+            <a:ext cx="128016" cy="365760"/>
+          </a:xfrm>
+          <a:prstGeom prst="rect">
+            <a:avLst/>
+          </a:prstGeom>
+          <a:noFill/>
+        </p:spPr>
+        <p:txBody>
+          <a:bodyPr wrap="square" lIns="0" rIns="0" tIns="0" bIns="0" anchor="ctr">
+            <a:spAutoFit/>
+          </a:bodyPr>
+          <a:lstStyle/>
+          <a:p>
+            <a:pPr algn="l">
+              <a:lnSpc>
+                <a:spcPct val="112000"/>
+              </a:lnSpc>
+            </a:pPr>
+            <a:r>
+              <a:rPr sz="950" b="1" i="0">
+                <a:solidFill>
+                  <a:srgbClr val="12A150"/>
+                </a:solidFill>
+                <a:latin typeface="Segoe UI"/>
+              </a:rPr>
+              <a:t>✓</a:t>
+            </a:r>
+          </a:p>
+        </p:txBody>
+      </p:sp>
+      <p:sp>
+        <p:nvSpPr>
+          <p:cNvPr id="37" name="TextBox 36"/>
+          <p:cNvSpPr txBox="1"/>
+          <p:nvPr/>
+        </p:nvSpPr>
+        <p:spPr>
+          <a:xfrm>
+            <a:off x="4626864" y="2514600"/>
+            <a:ext cx="3090672" cy="365760"/>
+          </a:xfrm>
+          <a:prstGeom prst="rect">
+            <a:avLst/>
+          </a:prstGeom>
+          <a:noFill/>
+        </p:spPr>
+        <p:txBody>
+          <a:bodyPr wrap="square" lIns="0" rIns="0" tIns="0" bIns="0" anchor="ctr">
+            <a:spAutoFit/>
+          </a:bodyPr>
+          <a:lstStyle/>
+          <a:p>
+            <a:pPr algn="l">
+              <a:lnSpc>
+                <a:spcPct val="115000"/>
+              </a:lnSpc>
+            </a:pPr>
+            <a:r>
+              <a:rPr sz="950" b="0" i="0">
+                <a:solidFill>
+                  <a:srgbClr val="1A1E2C"/>
+                </a:solidFill>
+                <a:latin typeface="Segoe UI"/>
+              </a:rPr>
+              <a:t>Leaves out the rest — it won't touch the door locks to plan dinner.</a:t>
+            </a:r>
+          </a:p>
+        </p:txBody>
+      </p:sp>
+      <p:sp>
+        <p:nvSpPr>
+          <p:cNvPr id="38" name="Freeform 37"/>
+          <p:cNvSpPr/>
+          <p:nvPr/>
+        </p:nvSpPr>
+        <p:spPr>
+          <a:xfrm>
+            <a:off x="7955280" y="2084832"/>
+            <a:ext cx="219456" cy="128016"/>
           </a:xfrm>
           <a:custGeom>
             <a:avLst/>
@@ -4594,24 +4770,24 @@
             <a:cxnLst/>
             <a:rect l="l" t="t" r="r" b="b"/>
             <a:pathLst>
-              <a:path w="185928" h="128016">
+              <a:path w="219456" h="128016">
                 <a:moveTo>
                   <a:pt x="0" y="45720"/>
                 </a:moveTo>
                 <a:lnTo>
-                  <a:pt x="85344" y="45720"/>
-                </a:lnTo>
-                <a:lnTo>
-                  <a:pt x="85344" y="0"/>
-                </a:lnTo>
-                <a:lnTo>
-                  <a:pt x="185928" y="64008"/>
-                </a:lnTo>
-                <a:lnTo>
-                  <a:pt x="85344" y="128016"/>
-                </a:lnTo>
-                <a:lnTo>
-                  <a:pt x="85344" y="82296"/>
+                  <a:pt x="118872" y="45720"/>
+                </a:lnTo>
+                <a:lnTo>
+                  <a:pt x="118872" y="0"/>
+                </a:lnTo>
+                <a:lnTo>
+                  <a:pt x="219456" y="64008"/>
+                </a:lnTo>
+                <a:lnTo>
+                  <a:pt x="118872" y="128016"/>
+                </a:lnTo>
+                <a:lnTo>
+                  <a:pt x="118872" y="82296"/>
                 </a:lnTo>
                 <a:lnTo>
                   <a:pt x="0" y="82296"/>
@@ -4652,18 +4828,18 @@
       </p:sp>
       <p:sp>
         <p:nvSpPr>
-          <p:cNvPr id="35" name="Rounded Rectangle 34"/>
+          <p:cNvPr id="39" name="Rounded Rectangle 38"/>
           <p:cNvSpPr/>
           <p:nvPr/>
         </p:nvSpPr>
         <p:spPr>
           <a:xfrm>
-            <a:off x="6224016" y="2048256"/>
-            <a:ext cx="2633472" cy="1700784"/>
+            <a:off x="8211312" y="1353312"/>
+            <a:ext cx="3657600" cy="1591056"/>
           </a:xfrm>
           <a:prstGeom prst="roundRect">
             <a:avLst>
-              <a:gd name="adj" fmla="val 5376"/>
+              <a:gd name="adj" fmla="val 5747"/>
             </a:avLst>
           </a:prstGeom>
           <a:solidFill>
@@ -4698,14 +4874,14 @@
       </p:sp>
       <p:sp>
         <p:nvSpPr>
-          <p:cNvPr id="36" name="Oval 35"/>
+          <p:cNvPr id="40" name="Oval 39"/>
           <p:cNvSpPr/>
           <p:nvPr/>
         </p:nvSpPr>
         <p:spPr>
           <a:xfrm>
-            <a:off x="6388608" y="2203704"/>
-            <a:ext cx="256032" cy="256032"/>
+            <a:off x="8357616" y="1463040"/>
+            <a:ext cx="237744" cy="237744"/>
           </a:xfrm>
           <a:prstGeom prst="ellipse">
             <a:avLst/>
@@ -4742,14 +4918,14 @@
       </p:sp>
       <p:sp>
         <p:nvSpPr>
-          <p:cNvPr id="37" name="TextBox 36"/>
+          <p:cNvPr id="41" name="TextBox 40"/>
           <p:cNvSpPr txBox="1"/>
           <p:nvPr/>
         </p:nvSpPr>
         <p:spPr>
           <a:xfrm>
-            <a:off x="6388608" y="2203704"/>
-            <a:ext cx="256032" cy="256032"/>
+            <a:off x="8357616" y="1463040"/>
+            <a:ext cx="237744" cy="237744"/>
           </a:xfrm>
           <a:prstGeom prst="rect">
             <a:avLst/>
@@ -4781,14 +4957,14 @@
       </p:sp>
       <p:sp>
         <p:nvSpPr>
-          <p:cNvPr id="38" name="TextBox 37"/>
+          <p:cNvPr id="42" name="TextBox 41"/>
           <p:cNvSpPr txBox="1"/>
           <p:nvPr/>
         </p:nvSpPr>
         <p:spPr>
           <a:xfrm>
-            <a:off x="6754368" y="2185416"/>
-            <a:ext cx="1975104" cy="292608"/>
+            <a:off x="8686800" y="1463040"/>
+            <a:ext cx="3035808" cy="237744"/>
           </a:xfrm>
           <a:prstGeom prst="rect">
             <a:avLst/>
@@ -4807,7 +4983,7 @@
               </a:lnSpc>
             </a:pPr>
             <a:r>
-              <a:rPr sz="1300" b="1" i="0">
+              <a:rPr sz="1250" b="1" i="0">
                 <a:solidFill>
                   <a:srgbClr val="1A1E2C"/>
                 </a:solidFill>
@@ -4820,14 +4996,14 @@
       </p:sp>
       <p:sp>
         <p:nvSpPr>
-          <p:cNvPr id="39" name="TextBox 38"/>
+          <p:cNvPr id="43" name="TextBox 42"/>
           <p:cNvSpPr txBox="1"/>
           <p:nvPr/>
         </p:nvSpPr>
         <p:spPr>
           <a:xfrm>
-            <a:off x="6388608" y="2542032"/>
-            <a:ext cx="2304288" cy="365760"/>
+            <a:off x="8357616" y="1755648"/>
+            <a:ext cx="3364992" cy="310896"/>
           </a:xfrm>
           <a:prstGeom prst="rect">
             <a:avLst/>
@@ -4846,67 +5022,31 @@
               </a:lnSpc>
             </a:pPr>
             <a:r>
-              <a:rPr sz="1100" b="0" i="0">
+              <a:rPr sz="1050" b="0" i="0">
                 <a:solidFill>
                   <a:srgbClr val="5C6377"/>
                 </a:solidFill>
                 <a:latin typeface="Segoe UI"/>
               </a:rPr>
-              <a:t>Turn one sentence into a to-do list.</a:t>
-            </a:r>
-          </a:p>
-        </p:txBody>
-      </p:sp>
-      <p:cxnSp>
-        <p:nvCxnSpPr>
-          <p:cNvPr id="40" name="Connector 39"/>
-          <p:cNvCxnSpPr/>
-          <p:nvPr/>
-        </p:nvCxnSpPr>
-        <p:spPr>
-          <a:xfrm>
-            <a:off x="6388608" y="2935224"/>
-            <a:ext cx="2304288" cy="0"/>
-          </a:xfrm>
-          <a:prstGeom prst="line">
-            <a:avLst/>
-          </a:prstGeom>
-          <a:ln w="12700">
-            <a:solidFill>
-              <a:srgbClr val="E2E6F0"/>
-            </a:solidFill>
-          </a:ln>
-          <a:effectLst/>
-        </p:spPr>
-        <p:style>
-          <a:lnRef idx="2">
-            <a:schemeClr val="accent1"/>
-          </a:lnRef>
-          <a:fillRef idx="0">
-            <a:schemeClr val="accent1"/>
-          </a:fillRef>
-          <a:effectRef idx="1">
-            <a:schemeClr val="accent1"/>
-          </a:effectRef>
-          <a:fontRef idx="minor">
-            <a:schemeClr val="tx1"/>
-          </a:fontRef>
-        </p:style>
-      </p:cxnSp>
-      <p:sp>
-        <p:nvSpPr>
-          <p:cNvPr id="41" name="Rounded Rectangle 40"/>
+              <a:t>Break the goal into jobs and follow them.</a:t>
+            </a:r>
+          </a:p>
+        </p:txBody>
+      </p:sp>
+      <p:sp>
+        <p:nvSpPr>
+          <p:cNvPr id="44" name="Rounded Rectangle 43"/>
           <p:cNvSpPr/>
           <p:nvPr/>
         </p:nvSpPr>
         <p:spPr>
           <a:xfrm>
-            <a:off x="6388608" y="3017520"/>
-            <a:ext cx="2304288" cy="603504"/>
+            <a:off x="8321040" y="2103120"/>
+            <a:ext cx="3438144" cy="365760"/>
           </a:xfrm>
           <a:prstGeom prst="roundRect">
             <a:avLst>
-              <a:gd name="adj" fmla="val 12121"/>
+              <a:gd name="adj" fmla="val 20000"/>
             </a:avLst>
           </a:prstGeom>
           <a:solidFill>
@@ -4941,14 +5081,14 @@
       </p:sp>
       <p:sp>
         <p:nvSpPr>
-          <p:cNvPr id="42" name="TextBox 41"/>
+          <p:cNvPr id="45" name="TextBox 44"/>
           <p:cNvSpPr txBox="1"/>
           <p:nvPr/>
         </p:nvSpPr>
         <p:spPr>
           <a:xfrm>
-            <a:off x="6480048" y="3090672"/>
-            <a:ext cx="146304" cy="164592"/>
+            <a:off x="8412480" y="2103120"/>
+            <a:ext cx="128016" cy="365760"/>
           </a:xfrm>
           <a:prstGeom prst="rect">
             <a:avLst/>
@@ -4956,7 +5096,7 @@
           <a:noFill/>
         </p:spPr>
         <p:txBody>
-          <a:bodyPr wrap="square" lIns="0" rIns="0" tIns="0" bIns="0" anchor="t">
+          <a:bodyPr wrap="square" lIns="0" rIns="0" tIns="0" bIns="0" anchor="ctr">
             <a:spAutoFit/>
           </a:bodyPr>
           <a:lstStyle/>
@@ -4967,7 +5107,7 @@
               </a:lnSpc>
             </a:pPr>
             <a:r>
-              <a:rPr sz="1050" b="1" i="0">
+              <a:rPr sz="950" b="1" i="0">
                 <a:solidFill>
                   <a:srgbClr val="12A150"/>
                 </a:solidFill>
@@ -4980,14 +5120,14 @@
       </p:sp>
       <p:sp>
         <p:nvSpPr>
-          <p:cNvPr id="43" name="TextBox 42"/>
+          <p:cNvPr id="46" name="TextBox 45"/>
           <p:cNvSpPr txBox="1"/>
           <p:nvPr/>
         </p:nvSpPr>
         <p:spPr>
           <a:xfrm>
-            <a:off x="6644640" y="3090672"/>
-            <a:ext cx="1956816" cy="493776"/>
+            <a:off x="8577072" y="2103120"/>
+            <a:ext cx="3090672" cy="365760"/>
           </a:xfrm>
           <a:prstGeom prst="rect">
             <a:avLst/>
@@ -4995,38 +5135,162 @@
           <a:noFill/>
         </p:spPr>
         <p:txBody>
-          <a:bodyPr wrap="square" lIns="0" rIns="0" tIns="0" bIns="0" anchor="t">
+          <a:bodyPr wrap="square" lIns="0" rIns="0" tIns="0" bIns="0" anchor="ctr">
             <a:spAutoFit/>
           </a:bodyPr>
           <a:lstStyle/>
           <a:p>
             <a:pPr algn="l">
               <a:lnSpc>
-                <a:spcPct val="118000"/>
+                <a:spcPct val="115000"/>
               </a:lnSpc>
             </a:pPr>
             <a:r>
-              <a:rPr sz="1050" b="0" i="0">
+              <a:rPr sz="950" b="0" i="0">
                 <a:solidFill>
                   <a:srgbClr val="1A1E2C"/>
                 </a:solidFill>
                 <a:latin typeface="Segoe UI"/>
               </a:rPr>
-              <a:t>Broke the week into smaller jobs and kept track of them.</a:t>
-            </a:r>
-          </a:p>
-        </p:txBody>
-      </p:sp>
-      <p:sp>
-        <p:nvSpPr>
-          <p:cNvPr id="44" name="Freeform 43"/>
+              <a:t>Two jobs from one sentence: eat healthier, and waste less.</a:t>
+            </a:r>
+          </a:p>
+        </p:txBody>
+      </p:sp>
+      <p:sp>
+        <p:nvSpPr>
+          <p:cNvPr id="47" name="Rounded Rectangle 46"/>
           <p:cNvSpPr/>
           <p:nvPr/>
         </p:nvSpPr>
         <p:spPr>
           <a:xfrm>
-            <a:off x="8894064" y="2834640"/>
-            <a:ext cx="185928" cy="128016"/>
+            <a:off x="8321040" y="2514600"/>
+            <a:ext cx="3438144" cy="365760"/>
+          </a:xfrm>
+          <a:prstGeom prst="roundRect">
+            <a:avLst>
+              <a:gd name="adj" fmla="val 20000"/>
+            </a:avLst>
+          </a:prstGeom>
+          <a:solidFill>
+            <a:srgbClr val="E7F7EE"/>
+          </a:solidFill>
+          <a:ln>
+            <a:noFill/>
+          </a:ln>
+          <a:effectLst/>
+        </p:spPr>
+        <p:style>
+          <a:lnRef idx="1">
+            <a:schemeClr val="accent1"/>
+          </a:lnRef>
+          <a:fillRef idx="3">
+            <a:schemeClr val="accent1"/>
+          </a:fillRef>
+          <a:effectRef idx="2">
+            <a:schemeClr val="accent1"/>
+          </a:effectRef>
+          <a:fontRef idx="minor">
+            <a:schemeClr val="lt1"/>
+          </a:fontRef>
+        </p:style>
+        <p:txBody>
+          <a:bodyPr rtlCol="0" anchor="ctr"/>
+          <a:lstStyle/>
+          <a:p>
+            <a:pPr algn="ctr"/>
+          </a:p>
+        </p:txBody>
+      </p:sp>
+      <p:sp>
+        <p:nvSpPr>
+          <p:cNvPr id="48" name="TextBox 47"/>
+          <p:cNvSpPr txBox="1"/>
+          <p:nvPr/>
+        </p:nvSpPr>
+        <p:spPr>
+          <a:xfrm>
+            <a:off x="8412480" y="2514600"/>
+            <a:ext cx="128016" cy="365760"/>
+          </a:xfrm>
+          <a:prstGeom prst="rect">
+            <a:avLst/>
+          </a:prstGeom>
+          <a:noFill/>
+        </p:spPr>
+        <p:txBody>
+          <a:bodyPr wrap="square" lIns="0" rIns="0" tIns="0" bIns="0" anchor="ctr">
+            <a:spAutoFit/>
+          </a:bodyPr>
+          <a:lstStyle/>
+          <a:p>
+            <a:pPr algn="l">
+              <a:lnSpc>
+                <a:spcPct val="112000"/>
+              </a:lnSpc>
+            </a:pPr>
+            <a:r>
+              <a:rPr sz="950" b="1" i="0">
+                <a:solidFill>
+                  <a:srgbClr val="12A150"/>
+                </a:solidFill>
+                <a:latin typeface="Segoe UI"/>
+              </a:rPr>
+              <a:t>✓</a:t>
+            </a:r>
+          </a:p>
+        </p:txBody>
+      </p:sp>
+      <p:sp>
+        <p:nvSpPr>
+          <p:cNvPr id="49" name="TextBox 48"/>
+          <p:cNvSpPr txBox="1"/>
+          <p:nvPr/>
+        </p:nvSpPr>
+        <p:spPr>
+          <a:xfrm>
+            <a:off x="8577072" y="2514600"/>
+            <a:ext cx="3090672" cy="365760"/>
+          </a:xfrm>
+          <a:prstGeom prst="rect">
+            <a:avLst/>
+          </a:prstGeom>
+          <a:noFill/>
+        </p:spPr>
+        <p:txBody>
+          <a:bodyPr wrap="square" lIns="0" rIns="0" tIns="0" bIns="0" anchor="ctr">
+            <a:spAutoFit/>
+          </a:bodyPr>
+          <a:lstStyle/>
+          <a:p>
+            <a:pPr algn="l">
+              <a:lnSpc>
+                <a:spcPct val="115000"/>
+              </a:lnSpc>
+            </a:pPr>
+            <a:r>
+              <a:rPr sz="950" b="0" i="0">
+                <a:solidFill>
+                  <a:srgbClr val="1A1E2C"/>
+                </a:solidFill>
+                <a:latin typeface="Segoe UI"/>
+              </a:rPr>
+              <a:t>Under them: find what's going off, choose meals, fix the shopping list.</a:t>
+            </a:r>
+          </a:p>
+        </p:txBody>
+      </p:sp>
+      <p:sp>
+        <p:nvSpPr>
+          <p:cNvPr id="50" name="Freeform 49"/>
+          <p:cNvSpPr/>
+          <p:nvPr/>
+        </p:nvSpPr>
+        <p:spPr>
+          <a:xfrm>
+            <a:off x="9976104" y="2971800"/>
+            <a:ext cx="128016" cy="210312"/>
           </a:xfrm>
           <a:custGeom>
             <a:avLst/>
@@ -5035,27 +5299,27 @@
             <a:cxnLst/>
             <a:rect l="l" t="t" r="r" b="b"/>
             <a:pathLst>
-              <a:path w="185928" h="128016">
+              <a:path w="128016" h="210312">
                 <a:moveTo>
-                  <a:pt x="0" y="45720"/>
+                  <a:pt x="45720" y="0"/>
                 </a:moveTo>
                 <a:lnTo>
-                  <a:pt x="85344" y="45720"/>
-                </a:lnTo>
-                <a:lnTo>
-                  <a:pt x="85344" y="0"/>
-                </a:lnTo>
-                <a:lnTo>
-                  <a:pt x="185928" y="64008"/>
-                </a:lnTo>
-                <a:lnTo>
-                  <a:pt x="85344" y="128016"/>
-                </a:lnTo>
-                <a:lnTo>
-                  <a:pt x="85344" y="82296"/>
-                </a:lnTo>
-                <a:lnTo>
-                  <a:pt x="0" y="82296"/>
+                  <a:pt x="45720" y="109728"/>
+                </a:lnTo>
+                <a:lnTo>
+                  <a:pt x="0" y="109728"/>
+                </a:lnTo>
+                <a:lnTo>
+                  <a:pt x="64008" y="210312"/>
+                </a:lnTo>
+                <a:lnTo>
+                  <a:pt x="128016" y="109728"/>
+                </a:lnTo>
+                <a:lnTo>
+                  <a:pt x="82296" y="109728"/>
+                </a:lnTo>
+                <a:lnTo>
+                  <a:pt x="82296" y="0"/>
                 </a:lnTo>
                 <a:close/>
               </a:path>
@@ -5093,18 +5357,18 @@
       </p:sp>
       <p:sp>
         <p:nvSpPr>
-          <p:cNvPr id="45" name="Rounded Rectangle 44"/>
+          <p:cNvPr id="51" name="Rounded Rectangle 50"/>
           <p:cNvSpPr/>
           <p:nvPr/>
         </p:nvSpPr>
         <p:spPr>
           <a:xfrm>
-            <a:off x="9116568" y="2048256"/>
-            <a:ext cx="2633472" cy="1700784"/>
+            <a:off x="8211312" y="3209544"/>
+            <a:ext cx="3657600" cy="1591056"/>
           </a:xfrm>
           <a:prstGeom prst="roundRect">
             <a:avLst>
-              <a:gd name="adj" fmla="val 5376"/>
+              <a:gd name="adj" fmla="val 5747"/>
             </a:avLst>
           </a:prstGeom>
           <a:solidFill>
@@ -5139,14 +5403,14 @@
       </p:sp>
       <p:sp>
         <p:nvSpPr>
-          <p:cNvPr id="46" name="Oval 45"/>
+          <p:cNvPr id="52" name="Oval 51"/>
           <p:cNvSpPr/>
           <p:nvPr/>
         </p:nvSpPr>
         <p:spPr>
           <a:xfrm>
-            <a:off x="9281160" y="2203704"/>
-            <a:ext cx="256032" cy="256032"/>
+            <a:off x="8357616" y="3319272"/>
+            <a:ext cx="237744" cy="237744"/>
           </a:xfrm>
           <a:prstGeom prst="ellipse">
             <a:avLst/>
@@ -5183,14 +5447,14 @@
       </p:sp>
       <p:sp>
         <p:nvSpPr>
-          <p:cNvPr id="47" name="TextBox 46"/>
+          <p:cNvPr id="53" name="TextBox 52"/>
           <p:cNvSpPr txBox="1"/>
           <p:nvPr/>
         </p:nvSpPr>
         <p:spPr>
           <a:xfrm>
-            <a:off x="9281160" y="2203704"/>
-            <a:ext cx="256032" cy="256032"/>
+            <a:off x="8357616" y="3319272"/>
+            <a:ext cx="237744" cy="237744"/>
           </a:xfrm>
           <a:prstGeom prst="rect">
             <a:avLst/>
@@ -5222,14 +5486,14 @@
       </p:sp>
       <p:sp>
         <p:nvSpPr>
-          <p:cNvPr id="48" name="TextBox 47"/>
+          <p:cNvPr id="54" name="TextBox 53"/>
           <p:cNvSpPr txBox="1"/>
           <p:nvPr/>
         </p:nvSpPr>
         <p:spPr>
           <a:xfrm>
-            <a:off x="9646920" y="2185416"/>
-            <a:ext cx="1975104" cy="292608"/>
+            <a:off x="8686800" y="3319272"/>
+            <a:ext cx="3035808" cy="237744"/>
           </a:xfrm>
           <a:prstGeom prst="rect">
             <a:avLst/>
@@ -5248,7 +5512,7 @@
               </a:lnSpc>
             </a:pPr>
             <a:r>
-              <a:rPr sz="1300" b="1" i="0">
+              <a:rPr sz="1250" b="1" i="0">
                 <a:solidFill>
                   <a:srgbClr val="1A1E2C"/>
                 </a:solidFill>
@@ -5261,14 +5525,14 @@
       </p:sp>
       <p:sp>
         <p:nvSpPr>
-          <p:cNvPr id="49" name="TextBox 48"/>
+          <p:cNvPr id="55" name="TextBox 54"/>
           <p:cNvSpPr txBox="1"/>
           <p:nvPr/>
         </p:nvSpPr>
         <p:spPr>
           <a:xfrm>
-            <a:off x="9281160" y="2542032"/>
-            <a:ext cx="2304288" cy="365760"/>
+            <a:off x="8357616" y="3611880"/>
+            <a:ext cx="3364992" cy="310896"/>
           </a:xfrm>
           <a:prstGeom prst="rect">
             <a:avLst/>
@@ -5287,67 +5551,31 @@
               </a:lnSpc>
             </a:pPr>
             <a:r>
-              <a:rPr sz="1100" b="0" i="0">
+              <a:rPr sz="1050" b="0" i="0">
                 <a:solidFill>
                   <a:srgbClr val="5C6377"/>
                 </a:solidFill>
                 <a:latin typeface="Segoe UI"/>
               </a:rPr>
-              <a:t>Go and look at the real world.</a:t>
-            </a:r>
-          </a:p>
-        </p:txBody>
-      </p:sp>
-      <p:cxnSp>
-        <p:nvCxnSpPr>
-          <p:cNvPr id="50" name="Connector 49"/>
-          <p:cNvCxnSpPr/>
-          <p:nvPr/>
-        </p:nvCxnSpPr>
-        <p:spPr>
-          <a:xfrm>
-            <a:off x="9281160" y="2935224"/>
-            <a:ext cx="2304288" cy="0"/>
-          </a:xfrm>
-          <a:prstGeom prst="line">
-            <a:avLst/>
-          </a:prstGeom>
-          <a:ln w="12700">
-            <a:solidFill>
-              <a:srgbClr val="E2E6F0"/>
-            </a:solidFill>
-          </a:ln>
-          <a:effectLst/>
-        </p:spPr>
-        <p:style>
-          <a:lnRef idx="2">
-            <a:schemeClr val="accent1"/>
-          </a:lnRef>
-          <a:fillRef idx="0">
-            <a:schemeClr val="accent1"/>
-          </a:fillRef>
-          <a:effectRef idx="1">
-            <a:schemeClr val="accent1"/>
-          </a:effectRef>
-          <a:fontRef idx="minor">
-            <a:schemeClr val="tx1"/>
-          </a:fontRef>
-        </p:style>
-      </p:cxnSp>
-      <p:sp>
-        <p:nvSpPr>
-          <p:cNvPr id="51" name="Rounded Rectangle 50"/>
+              <a:t>Go and look at what is really there.</a:t>
+            </a:r>
+          </a:p>
+        </p:txBody>
+      </p:sp>
+      <p:sp>
+        <p:nvSpPr>
+          <p:cNvPr id="56" name="Rounded Rectangle 55"/>
           <p:cNvSpPr/>
           <p:nvPr/>
         </p:nvSpPr>
         <p:spPr>
           <a:xfrm>
-            <a:off x="9281160" y="3017520"/>
-            <a:ext cx="2304288" cy="603504"/>
+            <a:off x="8321040" y="3959352"/>
+            <a:ext cx="3438144" cy="365760"/>
           </a:xfrm>
           <a:prstGeom prst="roundRect">
             <a:avLst>
-              <a:gd name="adj" fmla="val 12121"/>
+              <a:gd name="adj" fmla="val 20000"/>
             </a:avLst>
           </a:prstGeom>
           <a:solidFill>
@@ -5382,14 +5610,14 @@
       </p:sp>
       <p:sp>
         <p:nvSpPr>
-          <p:cNvPr id="52" name="TextBox 51"/>
+          <p:cNvPr id="57" name="TextBox 56"/>
           <p:cNvSpPr txBox="1"/>
           <p:nvPr/>
         </p:nvSpPr>
         <p:spPr>
           <a:xfrm>
-            <a:off x="9372600" y="3090672"/>
-            <a:ext cx="146304" cy="164592"/>
+            <a:off x="8412480" y="3959352"/>
+            <a:ext cx="128016" cy="365760"/>
           </a:xfrm>
           <a:prstGeom prst="rect">
             <a:avLst/>
@@ -5397,7 +5625,7 @@
           <a:noFill/>
         </p:spPr>
         <p:txBody>
-          <a:bodyPr wrap="square" lIns="0" rIns="0" tIns="0" bIns="0" anchor="t">
+          <a:bodyPr wrap="square" lIns="0" rIns="0" tIns="0" bIns="0" anchor="ctr">
             <a:spAutoFit/>
           </a:bodyPr>
           <a:lstStyle/>
@@ -5408,7 +5636,7 @@
               </a:lnSpc>
             </a:pPr>
             <a:r>
-              <a:rPr sz="1050" b="1" i="0">
+              <a:rPr sz="950" b="1" i="0">
                 <a:solidFill>
                   <a:srgbClr val="12A150"/>
                 </a:solidFill>
@@ -5421,14 +5649,14 @@
       </p:sp>
       <p:sp>
         <p:nvSpPr>
-          <p:cNvPr id="53" name="TextBox 52"/>
+          <p:cNvPr id="58" name="TextBox 57"/>
           <p:cNvSpPr txBox="1"/>
           <p:nvPr/>
         </p:nvSpPr>
         <p:spPr>
           <a:xfrm>
-            <a:off x="9537192" y="3090672"/>
-            <a:ext cx="1956816" cy="493776"/>
+            <a:off x="8577072" y="3959352"/>
+            <a:ext cx="3090672" cy="365760"/>
           </a:xfrm>
           <a:prstGeom prst="rect">
             <a:avLst/>
@@ -5436,38 +5664,162 @@
           <a:noFill/>
         </p:spPr>
         <p:txBody>
-          <a:bodyPr wrap="square" lIns="0" rIns="0" tIns="0" bIns="0" anchor="t">
+          <a:bodyPr wrap="square" lIns="0" rIns="0" tIns="0" bIns="0" anchor="ctr">
             <a:spAutoFit/>
           </a:bodyPr>
           <a:lstStyle/>
           <a:p>
             <a:pPr algn="l">
               <a:lnSpc>
-                <a:spcPct val="118000"/>
+                <a:spcPct val="115000"/>
               </a:lnSpc>
             </a:pPr>
             <a:r>
-              <a:rPr sz="1050" b="0" i="0">
+              <a:rPr sz="950" b="0" i="0">
                 <a:solidFill>
                   <a:srgbClr val="1A1E2C"/>
                 </a:solidFill>
                 <a:latin typeface="Segoe UI"/>
               </a:rPr>
-              <a:t>Spinach, yoghurt, bread and chicken were about to go off.</a:t>
-            </a:r>
-          </a:p>
-        </p:txBody>
-      </p:sp>
-      <p:sp>
-        <p:nvSpPr>
-          <p:cNvPr id="54" name="Freeform 53"/>
+              <a:t>Reads the fridge: spinach, yoghurt, bread and chicken go off in three days.</a:t>
+            </a:r>
+          </a:p>
+        </p:txBody>
+      </p:sp>
+      <p:sp>
+        <p:nvSpPr>
+          <p:cNvPr id="59" name="Rounded Rectangle 58"/>
           <p:cNvSpPr/>
           <p:nvPr/>
         </p:nvSpPr>
         <p:spPr>
           <a:xfrm>
-            <a:off x="10369296" y="3776472"/>
-            <a:ext cx="128016" cy="292608"/>
+            <a:off x="8321040" y="4370832"/>
+            <a:ext cx="3438144" cy="365760"/>
+          </a:xfrm>
+          <a:prstGeom prst="roundRect">
+            <a:avLst>
+              <a:gd name="adj" fmla="val 20000"/>
+            </a:avLst>
+          </a:prstGeom>
+          <a:solidFill>
+            <a:srgbClr val="E7F7EE"/>
+          </a:solidFill>
+          <a:ln>
+            <a:noFill/>
+          </a:ln>
+          <a:effectLst/>
+        </p:spPr>
+        <p:style>
+          <a:lnRef idx="1">
+            <a:schemeClr val="accent1"/>
+          </a:lnRef>
+          <a:fillRef idx="3">
+            <a:schemeClr val="accent1"/>
+          </a:fillRef>
+          <a:effectRef idx="2">
+            <a:schemeClr val="accent1"/>
+          </a:effectRef>
+          <a:fontRef idx="minor">
+            <a:schemeClr val="lt1"/>
+          </a:fontRef>
+        </p:style>
+        <p:txBody>
+          <a:bodyPr rtlCol="0" anchor="ctr"/>
+          <a:lstStyle/>
+          <a:p>
+            <a:pPr algn="ctr"/>
+          </a:p>
+        </p:txBody>
+      </p:sp>
+      <p:sp>
+        <p:nvSpPr>
+          <p:cNvPr id="60" name="TextBox 59"/>
+          <p:cNvSpPr txBox="1"/>
+          <p:nvPr/>
+        </p:nvSpPr>
+        <p:spPr>
+          <a:xfrm>
+            <a:off x="8412480" y="4370832"/>
+            <a:ext cx="128016" cy="365760"/>
+          </a:xfrm>
+          <a:prstGeom prst="rect">
+            <a:avLst/>
+          </a:prstGeom>
+          <a:noFill/>
+        </p:spPr>
+        <p:txBody>
+          <a:bodyPr wrap="square" lIns="0" rIns="0" tIns="0" bIns="0" anchor="ctr">
+            <a:spAutoFit/>
+          </a:bodyPr>
+          <a:lstStyle/>
+          <a:p>
+            <a:pPr algn="l">
+              <a:lnSpc>
+                <a:spcPct val="112000"/>
+              </a:lnSpc>
+            </a:pPr>
+            <a:r>
+              <a:rPr sz="950" b="1" i="0">
+                <a:solidFill>
+                  <a:srgbClr val="12A150"/>
+                </a:solidFill>
+                <a:latin typeface="Segoe UI"/>
+              </a:rPr>
+              <a:t>✓</a:t>
+            </a:r>
+          </a:p>
+        </p:txBody>
+      </p:sp>
+      <p:sp>
+        <p:nvSpPr>
+          <p:cNvPr id="61" name="TextBox 60"/>
+          <p:cNvSpPr txBox="1"/>
+          <p:nvPr/>
+        </p:nvSpPr>
+        <p:spPr>
+          <a:xfrm>
+            <a:off x="8577072" y="4370832"/>
+            <a:ext cx="3090672" cy="365760"/>
+          </a:xfrm>
+          <a:prstGeom prst="rect">
+            <a:avLst/>
+          </a:prstGeom>
+          <a:noFill/>
+        </p:spPr>
+        <p:txBody>
+          <a:bodyPr wrap="square" lIns="0" rIns="0" tIns="0" bIns="0" anchor="ctr">
+            <a:spAutoFit/>
+          </a:bodyPr>
+          <a:lstStyle/>
+          <a:p>
+            <a:pPr algn="l">
+              <a:lnSpc>
+                <a:spcPct val="115000"/>
+              </a:lnSpc>
+            </a:pPr>
+            <a:r>
+              <a:rPr sz="950" b="0" i="0">
+                <a:solidFill>
+                  <a:srgbClr val="1A1E2C"/>
+                </a:solidFill>
+                <a:latin typeface="Segoe UI"/>
+              </a:rPr>
+              <a:t>Reads the family: a peanut allergy, no pork, low salt, and how much everyone has been moving.</a:t>
+            </a:r>
+          </a:p>
+        </p:txBody>
+      </p:sp>
+      <p:sp>
+        <p:nvSpPr>
+          <p:cNvPr id="62" name="Freeform 61"/>
+          <p:cNvSpPr/>
+          <p:nvPr/>
+        </p:nvSpPr>
+        <p:spPr>
+          <a:xfrm>
+            <a:off x="7955280" y="3941064"/>
+            <a:ext cx="219456" cy="128016"/>
           </a:xfrm>
           <a:custGeom>
             <a:avLst/>
@@ -5476,27 +5828,27 @@
             <a:cxnLst/>
             <a:rect l="l" t="t" r="r" b="b"/>
             <a:pathLst>
-              <a:path w="128016" h="292608">
+              <a:path w="219456" h="128016">
                 <a:moveTo>
-                  <a:pt x="45720" y="0"/>
+                  <a:pt x="219456" y="45720"/>
                 </a:moveTo>
                 <a:lnTo>
-                  <a:pt x="45720" y="192024"/>
-                </a:lnTo>
-                <a:lnTo>
-                  <a:pt x="0" y="192024"/>
-                </a:lnTo>
-                <a:lnTo>
-                  <a:pt x="64008" y="292608"/>
-                </a:lnTo>
-                <a:lnTo>
-                  <a:pt x="128016" y="192024"/>
-                </a:lnTo>
-                <a:lnTo>
-                  <a:pt x="82296" y="192024"/>
-                </a:lnTo>
-                <a:lnTo>
-                  <a:pt x="82296" y="0"/>
+                  <a:pt x="100584" y="45720"/>
+                </a:lnTo>
+                <a:lnTo>
+                  <a:pt x="100584" y="0"/>
+                </a:lnTo>
+                <a:lnTo>
+                  <a:pt x="0" y="64008"/>
+                </a:lnTo>
+                <a:lnTo>
+                  <a:pt x="100584" y="128016"/>
+                </a:lnTo>
+                <a:lnTo>
+                  <a:pt x="100584" y="82296"/>
+                </a:lnTo>
+                <a:lnTo>
+                  <a:pt x="219456" y="82296"/>
                 </a:lnTo>
                 <a:close/>
               </a:path>
@@ -5534,18 +5886,18 @@
       </p:sp>
       <p:sp>
         <p:nvSpPr>
-          <p:cNvPr id="55" name="Rounded Rectangle 54"/>
+          <p:cNvPr id="63" name="Rounded Rectangle 62"/>
           <p:cNvSpPr/>
           <p:nvPr/>
         </p:nvSpPr>
         <p:spPr>
           <a:xfrm>
-            <a:off x="9116568" y="4096512"/>
-            <a:ext cx="2633472" cy="1700784"/>
+            <a:off x="4261104" y="3209544"/>
+            <a:ext cx="3657600" cy="1591056"/>
           </a:xfrm>
           <a:prstGeom prst="roundRect">
             <a:avLst>
-              <a:gd name="adj" fmla="val 5376"/>
+              <a:gd name="adj" fmla="val 5747"/>
             </a:avLst>
           </a:prstGeom>
           <a:solidFill>
@@ -5580,14 +5932,14 @@
       </p:sp>
       <p:sp>
         <p:nvSpPr>
-          <p:cNvPr id="56" name="Oval 55"/>
+          <p:cNvPr id="64" name="Oval 63"/>
           <p:cNvSpPr/>
           <p:nvPr/>
         </p:nvSpPr>
         <p:spPr>
           <a:xfrm>
-            <a:off x="9281160" y="4251960"/>
-            <a:ext cx="256032" cy="256032"/>
+            <a:off x="4407408" y="3319272"/>
+            <a:ext cx="237744" cy="237744"/>
           </a:xfrm>
           <a:prstGeom prst="ellipse">
             <a:avLst/>
@@ -5624,14 +5976,14 @@
       </p:sp>
       <p:sp>
         <p:nvSpPr>
-          <p:cNvPr id="57" name="TextBox 56"/>
+          <p:cNvPr id="65" name="TextBox 64"/>
           <p:cNvSpPr txBox="1"/>
           <p:nvPr/>
         </p:nvSpPr>
         <p:spPr>
           <a:xfrm>
-            <a:off x="9281160" y="4251960"/>
-            <a:ext cx="256032" cy="256032"/>
+            <a:off x="4407408" y="3319272"/>
+            <a:ext cx="237744" cy="237744"/>
           </a:xfrm>
           <a:prstGeom prst="rect">
             <a:avLst/>
@@ -5663,14 +6015,14 @@
       </p:sp>
       <p:sp>
         <p:nvSpPr>
-          <p:cNvPr id="58" name="TextBox 57"/>
+          <p:cNvPr id="66" name="TextBox 65"/>
           <p:cNvSpPr txBox="1"/>
           <p:nvPr/>
         </p:nvSpPr>
         <p:spPr>
           <a:xfrm>
-            <a:off x="9646920" y="4233672"/>
-            <a:ext cx="1975104" cy="292608"/>
+            <a:off x="4736592" y="3319272"/>
+            <a:ext cx="3035808" cy="237744"/>
           </a:xfrm>
           <a:prstGeom prst="rect">
             <a:avLst/>
@@ -5689,7 +6041,7 @@
               </a:lnSpc>
             </a:pPr>
             <a:r>
-              <a:rPr sz="1300" b="1" i="0">
+              <a:rPr sz="1250" b="1" i="0">
                 <a:solidFill>
                   <a:srgbClr val="1A1E2C"/>
                 </a:solidFill>
@@ -5702,14 +6054,14 @@
       </p:sp>
       <p:sp>
         <p:nvSpPr>
-          <p:cNvPr id="59" name="TextBox 58"/>
+          <p:cNvPr id="67" name="TextBox 66"/>
           <p:cNvSpPr txBox="1"/>
           <p:nvPr/>
         </p:nvSpPr>
         <p:spPr>
           <a:xfrm>
-            <a:off x="9281160" y="4590288"/>
-            <a:ext cx="2304288" cy="365760"/>
+            <a:off x="4407408" y="3611880"/>
+            <a:ext cx="3364992" cy="310896"/>
           </a:xfrm>
           <a:prstGeom prst="rect">
             <a:avLst/>
@@ -5728,67 +6080,31 @@
               </a:lnSpc>
             </a:pPr>
             <a:r>
-              <a:rPr sz="1100" b="0" i="0">
+              <a:rPr sz="1050" b="0" i="0">
                 <a:solidFill>
                   <a:srgbClr val="5C6377"/>
                 </a:solidFill>
                 <a:latin typeface="Segoe UI"/>
               </a:rPr>
-              <a:t>Decide what to actually cook.</a:t>
-            </a:r>
-          </a:p>
-        </p:txBody>
-      </p:sp>
-      <p:cxnSp>
-        <p:nvCxnSpPr>
-          <p:cNvPr id="60" name="Connector 59"/>
-          <p:cNvCxnSpPr/>
-          <p:nvPr/>
-        </p:nvCxnSpPr>
-        <p:spPr>
-          <a:xfrm>
-            <a:off x="9281160" y="4983480"/>
-            <a:ext cx="2304288" cy="0"/>
-          </a:xfrm>
-          <a:prstGeom prst="line">
-            <a:avLst/>
-          </a:prstGeom>
-          <a:ln w="12700">
-            <a:solidFill>
-              <a:srgbClr val="E2E6F0"/>
-            </a:solidFill>
-          </a:ln>
-          <a:effectLst/>
-        </p:spPr>
-        <p:style>
-          <a:lnRef idx="2">
-            <a:schemeClr val="accent1"/>
-          </a:lnRef>
-          <a:fillRef idx="0">
-            <a:schemeClr val="accent1"/>
-          </a:fillRef>
-          <a:effectRef idx="1">
-            <a:schemeClr val="accent1"/>
-          </a:effectRef>
-          <a:fontRef idx="minor">
-            <a:schemeClr val="tx1"/>
-          </a:fontRef>
-        </p:style>
-      </p:cxnSp>
-      <p:sp>
-        <p:nvSpPr>
-          <p:cNvPr id="61" name="Rounded Rectangle 60"/>
+              <a:t>Work out the week, day by day.</a:t>
+            </a:r>
+          </a:p>
+        </p:txBody>
+      </p:sp>
+      <p:sp>
+        <p:nvSpPr>
+          <p:cNvPr id="68" name="Rounded Rectangle 67"/>
           <p:cNvSpPr/>
           <p:nvPr/>
         </p:nvSpPr>
         <p:spPr>
           <a:xfrm>
-            <a:off x="9281160" y="5065776"/>
-            <a:ext cx="2304288" cy="603504"/>
+            <a:off x="4370832" y="3959352"/>
+            <a:ext cx="3438144" cy="365760"/>
           </a:xfrm>
           <a:prstGeom prst="roundRect">
             <a:avLst>
-              <a:gd name="adj" fmla="val 12121"/>
+              <a:gd name="adj" fmla="val 20000"/>
             </a:avLst>
           </a:prstGeom>
           <a:solidFill>
@@ -5823,14 +6139,14 @@
       </p:sp>
       <p:sp>
         <p:nvSpPr>
-          <p:cNvPr id="62" name="TextBox 61"/>
+          <p:cNvPr id="69" name="TextBox 68"/>
           <p:cNvSpPr txBox="1"/>
           <p:nvPr/>
         </p:nvSpPr>
         <p:spPr>
           <a:xfrm>
-            <a:off x="9372600" y="5138928"/>
-            <a:ext cx="146304" cy="164592"/>
+            <a:off x="4462272" y="3959352"/>
+            <a:ext cx="128016" cy="365760"/>
           </a:xfrm>
           <a:prstGeom prst="rect">
             <a:avLst/>
@@ -5838,7 +6154,7 @@
           <a:noFill/>
         </p:spPr>
         <p:txBody>
-          <a:bodyPr wrap="square" lIns="0" rIns="0" tIns="0" bIns="0" anchor="t">
+          <a:bodyPr wrap="square" lIns="0" rIns="0" tIns="0" bIns="0" anchor="ctr">
             <a:spAutoFit/>
           </a:bodyPr>
           <a:lstStyle/>
@@ -5849,7 +6165,7 @@
               </a:lnSpc>
             </a:pPr>
             <a:r>
-              <a:rPr sz="1050" b="1" i="0">
+              <a:rPr sz="950" b="1" i="0">
                 <a:solidFill>
                   <a:srgbClr val="12A150"/>
                 </a:solidFill>
@@ -5862,14 +6178,14 @@
       </p:sp>
       <p:sp>
         <p:nvSpPr>
-          <p:cNvPr id="63" name="TextBox 62"/>
+          <p:cNvPr id="70" name="TextBox 69"/>
           <p:cNvSpPr txBox="1"/>
           <p:nvPr/>
         </p:nvSpPr>
         <p:spPr>
           <a:xfrm>
-            <a:off x="9537192" y="5138928"/>
-            <a:ext cx="1956816" cy="493776"/>
+            <a:off x="4626864" y="3959352"/>
+            <a:ext cx="3090672" cy="365760"/>
           </a:xfrm>
           <a:prstGeom prst="rect">
             <a:avLst/>
@@ -5877,38 +6193,162 @@
           <a:noFill/>
         </p:spPr>
         <p:txBody>
-          <a:bodyPr wrap="square" lIns="0" rIns="0" tIns="0" bIns="0" anchor="t">
+          <a:bodyPr wrap="square" lIns="0" rIns="0" tIns="0" bIns="0" anchor="ctr">
             <a:spAutoFit/>
           </a:bodyPr>
           <a:lstStyle/>
           <a:p>
             <a:pPr algn="l">
               <a:lnSpc>
-                <a:spcPct val="118000"/>
+                <a:spcPct val="115000"/>
               </a:lnSpc>
             </a:pPr>
             <a:r>
-              <a:rPr sz="1050" b="0" i="0">
+              <a:rPr sz="950" b="0" i="0">
                 <a:solidFill>
                   <a:srgbClr val="1A1E2C"/>
                 </a:solidFill>
                 <a:latin typeface="Segoe UI"/>
               </a:rPr>
-              <a:t>Seven dinners, each with the reason it is there.</a:t>
-            </a:r>
-          </a:p>
-        </p:txBody>
-      </p:sp>
-      <p:sp>
-        <p:nvSpPr>
-          <p:cNvPr id="64" name="Freeform 63"/>
+              <a:t>Puts the spinach and chicken in the first dinners, so nothing goes in the bin.</a:t>
+            </a:r>
+          </a:p>
+        </p:txBody>
+      </p:sp>
+      <p:sp>
+        <p:nvSpPr>
+          <p:cNvPr id="71" name="Rounded Rectangle 70"/>
           <p:cNvSpPr/>
           <p:nvPr/>
         </p:nvSpPr>
         <p:spPr>
           <a:xfrm>
-            <a:off x="8894064" y="4882896"/>
-            <a:ext cx="185928" cy="128016"/>
+            <a:off x="4370832" y="4370832"/>
+            <a:ext cx="3438144" cy="365760"/>
+          </a:xfrm>
+          <a:prstGeom prst="roundRect">
+            <a:avLst>
+              <a:gd name="adj" fmla="val 20000"/>
+            </a:avLst>
+          </a:prstGeom>
+          <a:solidFill>
+            <a:srgbClr val="E7F7EE"/>
+          </a:solidFill>
+          <a:ln>
+            <a:noFill/>
+          </a:ln>
+          <a:effectLst/>
+        </p:spPr>
+        <p:style>
+          <a:lnRef idx="1">
+            <a:schemeClr val="accent1"/>
+          </a:lnRef>
+          <a:fillRef idx="3">
+            <a:schemeClr val="accent1"/>
+          </a:fillRef>
+          <a:effectRef idx="2">
+            <a:schemeClr val="accent1"/>
+          </a:effectRef>
+          <a:fontRef idx="minor">
+            <a:schemeClr val="lt1"/>
+          </a:fontRef>
+        </p:style>
+        <p:txBody>
+          <a:bodyPr rtlCol="0" anchor="ctr"/>
+          <a:lstStyle/>
+          <a:p>
+            <a:pPr algn="ctr"/>
+          </a:p>
+        </p:txBody>
+      </p:sp>
+      <p:sp>
+        <p:nvSpPr>
+          <p:cNvPr id="72" name="TextBox 71"/>
+          <p:cNvSpPr txBox="1"/>
+          <p:nvPr/>
+        </p:nvSpPr>
+        <p:spPr>
+          <a:xfrm>
+            <a:off x="4462272" y="4370832"/>
+            <a:ext cx="128016" cy="365760"/>
+          </a:xfrm>
+          <a:prstGeom prst="rect">
+            <a:avLst/>
+          </a:prstGeom>
+          <a:noFill/>
+        </p:spPr>
+        <p:txBody>
+          <a:bodyPr wrap="square" lIns="0" rIns="0" tIns="0" bIns="0" anchor="ctr">
+            <a:spAutoFit/>
+          </a:bodyPr>
+          <a:lstStyle/>
+          <a:p>
+            <a:pPr algn="l">
+              <a:lnSpc>
+                <a:spcPct val="112000"/>
+              </a:lnSpc>
+            </a:pPr>
+            <a:r>
+              <a:rPr sz="950" b="1" i="0">
+                <a:solidFill>
+                  <a:srgbClr val="12A150"/>
+                </a:solidFill>
+                <a:latin typeface="Segoe UI"/>
+              </a:rPr>
+              <a:t>✓</a:t>
+            </a:r>
+          </a:p>
+        </p:txBody>
+      </p:sp>
+      <p:sp>
+        <p:nvSpPr>
+          <p:cNvPr id="73" name="TextBox 72"/>
+          <p:cNvSpPr txBox="1"/>
+          <p:nvPr/>
+        </p:nvSpPr>
+        <p:spPr>
+          <a:xfrm>
+            <a:off x="4626864" y="4370832"/>
+            <a:ext cx="3090672" cy="365760"/>
+          </a:xfrm>
+          <a:prstGeom prst="rect">
+            <a:avLst/>
+          </a:prstGeom>
+          <a:noFill/>
+        </p:spPr>
+        <p:txBody>
+          <a:bodyPr wrap="square" lIns="0" rIns="0" tIns="0" bIns="0" anchor="ctr">
+            <a:spAutoFit/>
+          </a:bodyPr>
+          <a:lstStyle/>
+          <a:p>
+            <a:pPr algn="l">
+              <a:lnSpc>
+                <a:spcPct val="115000"/>
+              </a:lnSpc>
+            </a:pPr>
+            <a:r>
+              <a:rPr sz="950" b="0" i="0">
+                <a:solidFill>
+                  <a:srgbClr val="1A1E2C"/>
+                </a:solidFill>
+                <a:latin typeface="Segoe UI"/>
+              </a:rPr>
+              <a:t>Turns down beef chilli — the family would rather have white meat — and says so.</a:t>
+            </a:r>
+          </a:p>
+        </p:txBody>
+      </p:sp>
+      <p:sp>
+        <p:nvSpPr>
+          <p:cNvPr id="74" name="Freeform 73"/>
+          <p:cNvSpPr/>
+          <p:nvPr/>
+        </p:nvSpPr>
+        <p:spPr>
+          <a:xfrm>
+            <a:off x="4005072" y="3941064"/>
+            <a:ext cx="219456" cy="128016"/>
           </a:xfrm>
           <a:custGeom>
             <a:avLst/>
@@ -5917,9 +6357,9 @@
             <a:cxnLst/>
             <a:rect l="l" t="t" r="r" b="b"/>
             <a:pathLst>
-              <a:path w="185928" h="128016">
+              <a:path w="219456" h="128016">
                 <a:moveTo>
-                  <a:pt x="185928" y="45720"/>
+                  <a:pt x="219456" y="45720"/>
                 </a:moveTo>
                 <a:lnTo>
                   <a:pt x="100584" y="45720"/>
@@ -5937,7 +6377,7 @@
                   <a:pt x="100584" y="82296"/>
                 </a:lnTo>
                 <a:lnTo>
-                  <a:pt x="185928" y="82296"/>
+                  <a:pt x="219456" y="82296"/>
                 </a:lnTo>
                 <a:close/>
               </a:path>
@@ -5975,18 +6415,18 @@
       </p:sp>
       <p:sp>
         <p:nvSpPr>
-          <p:cNvPr id="65" name="Rounded Rectangle 64"/>
+          <p:cNvPr id="75" name="Rounded Rectangle 74"/>
           <p:cNvSpPr/>
           <p:nvPr/>
         </p:nvSpPr>
         <p:spPr>
           <a:xfrm>
-            <a:off x="6224016" y="4096512"/>
-            <a:ext cx="2633472" cy="1700784"/>
+            <a:off x="310896" y="3209544"/>
+            <a:ext cx="3657600" cy="1591056"/>
           </a:xfrm>
           <a:prstGeom prst="roundRect">
             <a:avLst>
-              <a:gd name="adj" fmla="val 5376"/>
+              <a:gd name="adj" fmla="val 5747"/>
             </a:avLst>
           </a:prstGeom>
           <a:solidFill>
@@ -6021,14 +6461,14 @@
       </p:sp>
       <p:sp>
         <p:nvSpPr>
-          <p:cNvPr id="66" name="Oval 65"/>
+          <p:cNvPr id="76" name="Oval 75"/>
           <p:cNvSpPr/>
           <p:nvPr/>
         </p:nvSpPr>
         <p:spPr>
           <a:xfrm>
-            <a:off x="6388608" y="4251960"/>
-            <a:ext cx="256032" cy="256032"/>
+            <a:off x="457200" y="3319272"/>
+            <a:ext cx="237744" cy="237744"/>
           </a:xfrm>
           <a:prstGeom prst="ellipse">
             <a:avLst/>
@@ -6065,14 +6505,14 @@
       </p:sp>
       <p:sp>
         <p:nvSpPr>
-          <p:cNvPr id="67" name="TextBox 66"/>
+          <p:cNvPr id="77" name="TextBox 76"/>
           <p:cNvSpPr txBox="1"/>
           <p:nvPr/>
         </p:nvSpPr>
         <p:spPr>
           <a:xfrm>
-            <a:off x="6388608" y="4251960"/>
-            <a:ext cx="256032" cy="256032"/>
+            <a:off x="457200" y="3319272"/>
+            <a:ext cx="237744" cy="237744"/>
           </a:xfrm>
           <a:prstGeom prst="rect">
             <a:avLst/>
@@ -6104,14 +6544,14 @@
       </p:sp>
       <p:sp>
         <p:nvSpPr>
-          <p:cNvPr id="68" name="TextBox 67"/>
+          <p:cNvPr id="78" name="TextBox 77"/>
           <p:cNvSpPr txBox="1"/>
           <p:nvPr/>
         </p:nvSpPr>
         <p:spPr>
           <a:xfrm>
-            <a:off x="6754368" y="4233672"/>
-            <a:ext cx="1975104" cy="292608"/>
+            <a:off x="786384" y="3319272"/>
+            <a:ext cx="3035808" cy="237744"/>
           </a:xfrm>
           <a:prstGeom prst="rect">
             <a:avLst/>
@@ -6130,7 +6570,7 @@
               </a:lnSpc>
             </a:pPr>
             <a:r>
-              <a:rPr sz="1300" b="1" i="0">
+              <a:rPr sz="1250" b="1" i="0">
                 <a:solidFill>
                   <a:srgbClr val="1A1E2C"/>
                 </a:solidFill>
@@ -6143,14 +6583,14 @@
       </p:sp>
       <p:sp>
         <p:nvSpPr>
-          <p:cNvPr id="69" name="TextBox 68"/>
+          <p:cNvPr id="79" name="TextBox 78"/>
           <p:cNvSpPr txBox="1"/>
           <p:nvPr/>
         </p:nvSpPr>
         <p:spPr>
           <a:xfrm>
-            <a:off x="6388608" y="4590288"/>
-            <a:ext cx="2304288" cy="365760"/>
+            <a:off x="457200" y="3611880"/>
+            <a:ext cx="3364992" cy="310896"/>
           </a:xfrm>
           <a:prstGeom prst="rect">
             <a:avLst/>
@@ -6169,67 +6609,31 @@
               </a:lnSpc>
             </a:pPr>
             <a:r>
-              <a:rPr sz="1100" b="0" i="0">
+              <a:rPr sz="1050" b="0" i="0">
                 <a:solidFill>
                   <a:srgbClr val="5C6377"/>
                 </a:solidFill>
                 <a:latin typeface="Segoe UI"/>
               </a:rPr>
-              <a:t>Check nothing breaks a house rule.</a:t>
-            </a:r>
-          </a:p>
-        </p:txBody>
-      </p:sp>
-      <p:cxnSp>
-        <p:nvCxnSpPr>
-          <p:cNvPr id="70" name="Connector 69"/>
-          <p:cNvCxnSpPr/>
-          <p:nvPr/>
-        </p:nvCxnSpPr>
-        <p:spPr>
-          <a:xfrm>
-            <a:off x="6388608" y="4983480"/>
-            <a:ext cx="2304288" cy="0"/>
-          </a:xfrm>
-          <a:prstGeom prst="line">
-            <a:avLst/>
-          </a:prstGeom>
-          <a:ln w="12700">
-            <a:solidFill>
-              <a:srgbClr val="E2E6F0"/>
-            </a:solidFill>
-          </a:ln>
-          <a:effectLst/>
-        </p:spPr>
-        <p:style>
-          <a:lnRef idx="2">
-            <a:schemeClr val="accent1"/>
-          </a:lnRef>
-          <a:fillRef idx="0">
-            <a:schemeClr val="accent1"/>
-          </a:fillRef>
-          <a:effectRef idx="1">
-            <a:schemeClr val="accent1"/>
-          </a:effectRef>
-          <a:fontRef idx="minor">
-            <a:schemeClr val="tx1"/>
-          </a:fontRef>
-        </p:style>
-      </p:cxnSp>
-      <p:sp>
-        <p:nvSpPr>
-          <p:cNvPr id="71" name="Rounded Rectangle 70"/>
+              <a:t>Decide what it may do alone, and what it must ask about.</a:t>
+            </a:r>
+          </a:p>
+        </p:txBody>
+      </p:sp>
+      <p:sp>
+        <p:nvSpPr>
+          <p:cNvPr id="80" name="Rounded Rectangle 79"/>
           <p:cNvSpPr/>
           <p:nvPr/>
         </p:nvSpPr>
         <p:spPr>
           <a:xfrm>
-            <a:off x="6388608" y="5065776"/>
-            <a:ext cx="2304288" cy="603504"/>
+            <a:off x="420624" y="3959352"/>
+            <a:ext cx="3438144" cy="365760"/>
           </a:xfrm>
           <a:prstGeom prst="roundRect">
             <a:avLst>
-              <a:gd name="adj" fmla="val 12121"/>
+              <a:gd name="adj" fmla="val 20000"/>
             </a:avLst>
           </a:prstGeom>
           <a:solidFill>
@@ -6264,14 +6668,14 @@
       </p:sp>
       <p:sp>
         <p:nvSpPr>
-          <p:cNvPr id="72" name="TextBox 71"/>
+          <p:cNvPr id="81" name="TextBox 80"/>
           <p:cNvSpPr txBox="1"/>
           <p:nvPr/>
         </p:nvSpPr>
         <p:spPr>
           <a:xfrm>
-            <a:off x="6480048" y="5138928"/>
-            <a:ext cx="146304" cy="164592"/>
+            <a:off x="512064" y="3959352"/>
+            <a:ext cx="128016" cy="365760"/>
           </a:xfrm>
           <a:prstGeom prst="rect">
             <a:avLst/>
@@ -6279,7 +6683,7 @@
           <a:noFill/>
         </p:spPr>
         <p:txBody>
-          <a:bodyPr wrap="square" lIns="0" rIns="0" tIns="0" bIns="0" anchor="t">
+          <a:bodyPr wrap="square" lIns="0" rIns="0" tIns="0" bIns="0" anchor="ctr">
             <a:spAutoFit/>
           </a:bodyPr>
           <a:lstStyle/>
@@ -6290,7 +6694,7 @@
               </a:lnSpc>
             </a:pPr>
             <a:r>
-              <a:rPr sz="1050" b="1" i="0">
+              <a:rPr sz="950" b="1" i="0">
                 <a:solidFill>
                   <a:srgbClr val="12A150"/>
                 </a:solidFill>
@@ -6303,14 +6707,14 @@
       </p:sp>
       <p:sp>
         <p:nvSpPr>
-          <p:cNvPr id="73" name="TextBox 72"/>
+          <p:cNvPr id="82" name="TextBox 81"/>
           <p:cNvSpPr txBox="1"/>
           <p:nvPr/>
         </p:nvSpPr>
         <p:spPr>
           <a:xfrm>
-            <a:off x="6644640" y="5138928"/>
-            <a:ext cx="1956816" cy="493776"/>
+            <a:off x="676656" y="3959352"/>
+            <a:ext cx="3090672" cy="365760"/>
           </a:xfrm>
           <a:prstGeom prst="rect">
             <a:avLst/>
@@ -6318,38 +6722,162 @@
           <a:noFill/>
         </p:spPr>
         <p:txBody>
-          <a:bodyPr wrap="square" lIns="0" rIns="0" tIns="0" bIns="0" anchor="t">
+          <a:bodyPr wrap="square" lIns="0" rIns="0" tIns="0" bIns="0" anchor="ctr">
             <a:spAutoFit/>
           </a:bodyPr>
           <a:lstStyle/>
           <a:p>
             <a:pPr algn="l">
               <a:lnSpc>
-                <a:spcPct val="118000"/>
+                <a:spcPct val="115000"/>
               </a:lnSpc>
             </a:pPr>
             <a:r>
-              <a:rPr sz="1050" b="0" i="0">
+              <a:rPr sz="950" b="0" i="0">
                 <a:solidFill>
                   <a:srgbClr val="1A1E2C"/>
                 </a:solidFill>
                 <a:latin typeface="Segoe UI"/>
               </a:rPr>
-              <a:t>The peanut allergy, no pork and low salt all held.</a:t>
-            </a:r>
-          </a:p>
-        </p:txBody>
-      </p:sp>
-      <p:sp>
-        <p:nvSpPr>
-          <p:cNvPr id="74" name="Freeform 73"/>
+              <a:t>Pork never even reaches the list of options.</a:t>
+            </a:r>
+          </a:p>
+        </p:txBody>
+      </p:sp>
+      <p:sp>
+        <p:nvSpPr>
+          <p:cNvPr id="83" name="Rounded Rectangle 82"/>
           <p:cNvSpPr/>
           <p:nvPr/>
         </p:nvSpPr>
         <p:spPr>
           <a:xfrm>
-            <a:off x="6001512" y="4882896"/>
-            <a:ext cx="185928" cy="128016"/>
+            <a:off x="420624" y="4370832"/>
+            <a:ext cx="3438144" cy="365760"/>
+          </a:xfrm>
+          <a:prstGeom prst="roundRect">
+            <a:avLst>
+              <a:gd name="adj" fmla="val 20000"/>
+            </a:avLst>
+          </a:prstGeom>
+          <a:solidFill>
+            <a:srgbClr val="E7F7EE"/>
+          </a:solidFill>
+          <a:ln>
+            <a:noFill/>
+          </a:ln>
+          <a:effectLst/>
+        </p:spPr>
+        <p:style>
+          <a:lnRef idx="1">
+            <a:schemeClr val="accent1"/>
+          </a:lnRef>
+          <a:fillRef idx="3">
+            <a:schemeClr val="accent1"/>
+          </a:fillRef>
+          <a:effectRef idx="2">
+            <a:schemeClr val="accent1"/>
+          </a:effectRef>
+          <a:fontRef idx="minor">
+            <a:schemeClr val="lt1"/>
+          </a:fontRef>
+        </p:style>
+        <p:txBody>
+          <a:bodyPr rtlCol="0" anchor="ctr"/>
+          <a:lstStyle/>
+          <a:p>
+            <a:pPr algn="ctr"/>
+          </a:p>
+        </p:txBody>
+      </p:sp>
+      <p:sp>
+        <p:nvSpPr>
+          <p:cNvPr id="84" name="TextBox 83"/>
+          <p:cNvSpPr txBox="1"/>
+          <p:nvPr/>
+        </p:nvSpPr>
+        <p:spPr>
+          <a:xfrm>
+            <a:off x="512064" y="4370832"/>
+            <a:ext cx="128016" cy="365760"/>
+          </a:xfrm>
+          <a:prstGeom prst="rect">
+            <a:avLst/>
+          </a:prstGeom>
+          <a:noFill/>
+        </p:spPr>
+        <p:txBody>
+          <a:bodyPr wrap="square" lIns="0" rIns="0" tIns="0" bIns="0" anchor="ctr">
+            <a:spAutoFit/>
+          </a:bodyPr>
+          <a:lstStyle/>
+          <a:p>
+            <a:pPr algn="l">
+              <a:lnSpc>
+                <a:spcPct val="112000"/>
+              </a:lnSpc>
+            </a:pPr>
+            <a:r>
+              <a:rPr sz="950" b="1" i="0">
+                <a:solidFill>
+                  <a:srgbClr val="12A150"/>
+                </a:solidFill>
+                <a:latin typeface="Segoe UI"/>
+              </a:rPr>
+              <a:t>✓</a:t>
+            </a:r>
+          </a:p>
+        </p:txBody>
+      </p:sp>
+      <p:sp>
+        <p:nvSpPr>
+          <p:cNvPr id="85" name="TextBox 84"/>
+          <p:cNvSpPr txBox="1"/>
+          <p:nvPr/>
+        </p:nvSpPr>
+        <p:spPr>
+          <a:xfrm>
+            <a:off x="676656" y="4370832"/>
+            <a:ext cx="3090672" cy="365760"/>
+          </a:xfrm>
+          <a:prstGeom prst="rect">
+            <a:avLst/>
+          </a:prstGeom>
+          <a:noFill/>
+        </p:spPr>
+        <p:txBody>
+          <a:bodyPr wrap="square" lIns="0" rIns="0" tIns="0" bIns="0" anchor="ctr">
+            <a:spAutoFit/>
+          </a:bodyPr>
+          <a:lstStyle/>
+          <a:p>
+            <a:pPr algn="l">
+              <a:lnSpc>
+                <a:spcPct val="115000"/>
+              </a:lnSpc>
+            </a:pPr>
+            <a:r>
+              <a:rPr sz="950" b="0" i="0">
+                <a:solidFill>
+                  <a:srgbClr val="1A1E2C"/>
+                </a:solidFill>
+                <a:latin typeface="Segoe UI"/>
+              </a:rPr>
+              <a:t>Suggesting the shopping is fine; actually ordering it needs a yes.</a:t>
+            </a:r>
+          </a:p>
+        </p:txBody>
+      </p:sp>
+      <p:sp>
+        <p:nvSpPr>
+          <p:cNvPr id="86" name="Freeform 85"/>
+          <p:cNvSpPr/>
+          <p:nvPr/>
+        </p:nvSpPr>
+        <p:spPr>
+          <a:xfrm>
+            <a:off x="2075688" y="4828032"/>
+            <a:ext cx="128016" cy="210312"/>
           </a:xfrm>
           <a:custGeom>
             <a:avLst/>
@@ -6358,27 +6886,27 @@
             <a:cxnLst/>
             <a:rect l="l" t="t" r="r" b="b"/>
             <a:pathLst>
-              <a:path w="185928" h="128016">
+              <a:path w="128016" h="210312">
                 <a:moveTo>
-                  <a:pt x="185928" y="45720"/>
+                  <a:pt x="45720" y="0"/>
                 </a:moveTo>
                 <a:lnTo>
-                  <a:pt x="100584" y="45720"/>
-                </a:lnTo>
-                <a:lnTo>
-                  <a:pt x="100584" y="0"/>
-                </a:lnTo>
-                <a:lnTo>
-                  <a:pt x="0" y="64008"/>
-                </a:lnTo>
-                <a:lnTo>
-                  <a:pt x="100584" y="128016"/>
-                </a:lnTo>
-                <a:lnTo>
-                  <a:pt x="100584" y="82296"/>
-                </a:lnTo>
-                <a:lnTo>
-                  <a:pt x="185928" y="82296"/>
+                  <a:pt x="45720" y="109728"/>
+                </a:lnTo>
+                <a:lnTo>
+                  <a:pt x="0" y="109728"/>
+                </a:lnTo>
+                <a:lnTo>
+                  <a:pt x="64008" y="210312"/>
+                </a:lnTo>
+                <a:lnTo>
+                  <a:pt x="128016" y="109728"/>
+                </a:lnTo>
+                <a:lnTo>
+                  <a:pt x="82296" y="109728"/>
+                </a:lnTo>
+                <a:lnTo>
+                  <a:pt x="82296" y="0"/>
                 </a:lnTo>
                 <a:close/>
               </a:path>
@@ -6416,18 +6944,18 @@
       </p:sp>
       <p:sp>
         <p:nvSpPr>
-          <p:cNvPr id="75" name="Rounded Rectangle 74"/>
+          <p:cNvPr id="87" name="Rounded Rectangle 86"/>
           <p:cNvSpPr/>
           <p:nvPr/>
         </p:nvSpPr>
         <p:spPr>
           <a:xfrm>
-            <a:off x="3331464" y="4096512"/>
-            <a:ext cx="2633472" cy="1700784"/>
+            <a:off x="310896" y="5065776"/>
+            <a:ext cx="3657600" cy="1591056"/>
           </a:xfrm>
           <a:prstGeom prst="roundRect">
             <a:avLst>
-              <a:gd name="adj" fmla="val 5376"/>
+              <a:gd name="adj" fmla="val 5747"/>
             </a:avLst>
           </a:prstGeom>
           <a:solidFill>
@@ -6462,14 +6990,14 @@
       </p:sp>
       <p:sp>
         <p:nvSpPr>
-          <p:cNvPr id="76" name="Oval 75"/>
+          <p:cNvPr id="88" name="Oval 87"/>
           <p:cNvSpPr/>
           <p:nvPr/>
         </p:nvSpPr>
         <p:spPr>
           <a:xfrm>
-            <a:off x="3496056" y="4251960"/>
-            <a:ext cx="256032" cy="256032"/>
+            <a:off x="457200" y="5175504"/>
+            <a:ext cx="237744" cy="237744"/>
           </a:xfrm>
           <a:prstGeom prst="ellipse">
             <a:avLst/>
@@ -6506,14 +7034,14 @@
       </p:sp>
       <p:sp>
         <p:nvSpPr>
-          <p:cNvPr id="77" name="TextBox 76"/>
+          <p:cNvPr id="89" name="TextBox 88"/>
           <p:cNvSpPr txBox="1"/>
           <p:nvPr/>
         </p:nvSpPr>
         <p:spPr>
           <a:xfrm>
-            <a:off x="3496056" y="4251960"/>
-            <a:ext cx="256032" cy="256032"/>
+            <a:off x="457200" y="5175504"/>
+            <a:ext cx="237744" cy="237744"/>
           </a:xfrm>
           <a:prstGeom prst="rect">
             <a:avLst/>
@@ -6545,14 +7073,14 @@
       </p:sp>
       <p:sp>
         <p:nvSpPr>
-          <p:cNvPr id="78" name="TextBox 77"/>
+          <p:cNvPr id="90" name="TextBox 89"/>
           <p:cNvSpPr txBox="1"/>
           <p:nvPr/>
         </p:nvSpPr>
         <p:spPr>
           <a:xfrm>
-            <a:off x="3861816" y="4233672"/>
-            <a:ext cx="1975104" cy="292608"/>
+            <a:off x="786384" y="5175504"/>
+            <a:ext cx="3035808" cy="237744"/>
           </a:xfrm>
           <a:prstGeom prst="rect">
             <a:avLst/>
@@ -6571,7 +7099,7 @@
               </a:lnSpc>
             </a:pPr>
             <a:r>
-              <a:rPr sz="1300" b="1" i="0">
+              <a:rPr sz="1250" b="1" i="0">
                 <a:solidFill>
                   <a:srgbClr val="1A1E2C"/>
                 </a:solidFill>
@@ -6584,14 +7112,14 @@
       </p:sp>
       <p:sp>
         <p:nvSpPr>
-          <p:cNvPr id="79" name="TextBox 78"/>
+          <p:cNvPr id="91" name="TextBox 90"/>
           <p:cNvSpPr txBox="1"/>
           <p:nvPr/>
         </p:nvSpPr>
         <p:spPr>
           <a:xfrm>
-            <a:off x="3496056" y="4590288"/>
-            <a:ext cx="2304288" cy="365760"/>
+            <a:off x="457200" y="5468112"/>
+            <a:ext cx="3364992" cy="310896"/>
           </a:xfrm>
           <a:prstGeom prst="rect">
             <a:avLst/>
@@ -6610,67 +7138,31 @@
               </a:lnSpc>
             </a:pPr>
             <a:r>
-              <a:rPr sz="1100" b="0" i="0">
+              <a:rPr sz="1050" b="0" i="0">
                 <a:solidFill>
                   <a:srgbClr val="5C6377"/>
                 </a:solidFill>
                 <a:latin typeface="Segoe UI"/>
               </a:rPr>
-              <a:t>Nothing real happens without a person.</a:t>
-            </a:r>
-          </a:p>
-        </p:txBody>
-      </p:sp>
-      <p:cxnSp>
-        <p:nvCxnSpPr>
-          <p:cNvPr id="80" name="Connector 79"/>
-          <p:cNvCxnSpPr/>
-          <p:nvPr/>
-        </p:nvCxnSpPr>
-        <p:spPr>
-          <a:xfrm>
-            <a:off x="3496056" y="4983480"/>
-            <a:ext cx="2304288" cy="0"/>
-          </a:xfrm>
-          <a:prstGeom prst="line">
-            <a:avLst/>
-          </a:prstGeom>
-          <a:ln w="12700">
-            <a:solidFill>
-              <a:srgbClr val="E2E6F0"/>
-            </a:solidFill>
-          </a:ln>
-          <a:effectLst/>
-        </p:spPr>
-        <p:style>
-          <a:lnRef idx="2">
-            <a:schemeClr val="accent1"/>
-          </a:lnRef>
-          <a:fillRef idx="0">
-            <a:schemeClr val="accent1"/>
-          </a:fillRef>
-          <a:effectRef idx="1">
-            <a:schemeClr val="accent1"/>
-          </a:effectRef>
-          <a:fontRef idx="minor">
-            <a:schemeClr val="tx1"/>
-          </a:fontRef>
-        </p:style>
-      </p:cxnSp>
-      <p:sp>
-        <p:nvSpPr>
-          <p:cNvPr id="81" name="Rounded Rectangle 80"/>
+              <a:t>Nothing real happens until someone says yes.</a:t>
+            </a:r>
+          </a:p>
+        </p:txBody>
+      </p:sp>
+      <p:sp>
+        <p:nvSpPr>
+          <p:cNvPr id="92" name="Rounded Rectangle 91"/>
           <p:cNvSpPr/>
           <p:nvPr/>
         </p:nvSpPr>
         <p:spPr>
           <a:xfrm>
-            <a:off x="3496056" y="5065776"/>
-            <a:ext cx="2304288" cy="603504"/>
+            <a:off x="420624" y="5815584"/>
+            <a:ext cx="3438144" cy="365760"/>
           </a:xfrm>
           <a:prstGeom prst="roundRect">
             <a:avLst>
-              <a:gd name="adj" fmla="val 12121"/>
+              <a:gd name="adj" fmla="val 20000"/>
             </a:avLst>
           </a:prstGeom>
           <a:solidFill>
@@ -6705,14 +7197,14 @@
       </p:sp>
       <p:sp>
         <p:nvSpPr>
-          <p:cNvPr id="82" name="TextBox 81"/>
+          <p:cNvPr id="93" name="TextBox 92"/>
           <p:cNvSpPr txBox="1"/>
           <p:nvPr/>
         </p:nvSpPr>
         <p:spPr>
           <a:xfrm>
-            <a:off x="3587496" y="5138928"/>
-            <a:ext cx="146304" cy="164592"/>
+            <a:off x="512064" y="5815584"/>
+            <a:ext cx="128016" cy="365760"/>
           </a:xfrm>
           <a:prstGeom prst="rect">
             <a:avLst/>
@@ -6720,7 +7212,7 @@
           <a:noFill/>
         </p:spPr>
         <p:txBody>
-          <a:bodyPr wrap="square" lIns="0" rIns="0" tIns="0" bIns="0" anchor="t">
+          <a:bodyPr wrap="square" lIns="0" rIns="0" tIns="0" bIns="0" anchor="ctr">
             <a:spAutoFit/>
           </a:bodyPr>
           <a:lstStyle/>
@@ -6731,7 +7223,7 @@
               </a:lnSpc>
             </a:pPr>
             <a:r>
-              <a:rPr sz="1050" b="1" i="0">
+              <a:rPr sz="950" b="1" i="0">
                 <a:solidFill>
                   <a:srgbClr val="12A150"/>
                 </a:solidFill>
@@ -6744,14 +7236,14 @@
       </p:sp>
       <p:sp>
         <p:nvSpPr>
-          <p:cNvPr id="83" name="TextBox 82"/>
+          <p:cNvPr id="94" name="TextBox 93"/>
           <p:cNvSpPr txBox="1"/>
           <p:nvPr/>
         </p:nvSpPr>
         <p:spPr>
           <a:xfrm>
-            <a:off x="3752088" y="5138928"/>
-            <a:ext cx="1956816" cy="493776"/>
+            <a:off x="676656" y="5815584"/>
+            <a:ext cx="3090672" cy="365760"/>
           </a:xfrm>
           <a:prstGeom prst="rect">
             <a:avLst/>
@@ -6759,38 +7251,162 @@
           <a:noFill/>
         </p:spPr>
         <p:txBody>
-          <a:bodyPr wrap="square" lIns="0" rIns="0" tIns="0" bIns="0" anchor="t">
+          <a:bodyPr wrap="square" lIns="0" rIns="0" tIns="0" bIns="0" anchor="ctr">
             <a:spAutoFit/>
           </a:bodyPr>
           <a:lstStyle/>
           <a:p>
             <a:pPr algn="l">
               <a:lnSpc>
-                <a:spcPct val="118000"/>
+                <a:spcPct val="115000"/>
               </a:lnSpc>
             </a:pPr>
             <a:r>
-              <a:rPr sz="1050" b="0" i="0">
+              <a:rPr sz="950" b="0" i="0">
                 <a:solidFill>
                   <a:srgbClr val="1A1E2C"/>
                 </a:solidFill>
                 <a:latin typeface="Segoe UI"/>
               </a:rPr>
-              <a:t>The shopping list changes waited for a yes.</a:t>
-            </a:r>
-          </a:p>
-        </p:txBody>
-      </p:sp>
-      <p:sp>
-        <p:nvSpPr>
-          <p:cNvPr id="84" name="Freeform 83"/>
+              <a:t>Holds one shopping list: the few things missing for the week.</a:t>
+            </a:r>
+          </a:p>
+        </p:txBody>
+      </p:sp>
+      <p:sp>
+        <p:nvSpPr>
+          <p:cNvPr id="95" name="Rounded Rectangle 94"/>
           <p:cNvSpPr/>
           <p:nvPr/>
         </p:nvSpPr>
         <p:spPr>
           <a:xfrm>
-            <a:off x="3108960" y="4882896"/>
-            <a:ext cx="185928" cy="128016"/>
+            <a:off x="420624" y="6227064"/>
+            <a:ext cx="3438144" cy="365760"/>
+          </a:xfrm>
+          <a:prstGeom prst="roundRect">
+            <a:avLst>
+              <a:gd name="adj" fmla="val 20000"/>
+            </a:avLst>
+          </a:prstGeom>
+          <a:solidFill>
+            <a:srgbClr val="E7F7EE"/>
+          </a:solidFill>
+          <a:ln>
+            <a:noFill/>
+          </a:ln>
+          <a:effectLst/>
+        </p:spPr>
+        <p:style>
+          <a:lnRef idx="1">
+            <a:schemeClr val="accent1"/>
+          </a:lnRef>
+          <a:fillRef idx="3">
+            <a:schemeClr val="accent1"/>
+          </a:fillRef>
+          <a:effectRef idx="2">
+            <a:schemeClr val="accent1"/>
+          </a:effectRef>
+          <a:fontRef idx="minor">
+            <a:schemeClr val="lt1"/>
+          </a:fontRef>
+        </p:style>
+        <p:txBody>
+          <a:bodyPr rtlCol="0" anchor="ctr"/>
+          <a:lstStyle/>
+          <a:p>
+            <a:pPr algn="ctr"/>
+          </a:p>
+        </p:txBody>
+      </p:sp>
+      <p:sp>
+        <p:nvSpPr>
+          <p:cNvPr id="96" name="TextBox 95"/>
+          <p:cNvSpPr txBox="1"/>
+          <p:nvPr/>
+        </p:nvSpPr>
+        <p:spPr>
+          <a:xfrm>
+            <a:off x="512064" y="6227064"/>
+            <a:ext cx="128016" cy="365760"/>
+          </a:xfrm>
+          <a:prstGeom prst="rect">
+            <a:avLst/>
+          </a:prstGeom>
+          <a:noFill/>
+        </p:spPr>
+        <p:txBody>
+          <a:bodyPr wrap="square" lIns="0" rIns="0" tIns="0" bIns="0" anchor="ctr">
+            <a:spAutoFit/>
+          </a:bodyPr>
+          <a:lstStyle/>
+          <a:p>
+            <a:pPr algn="l">
+              <a:lnSpc>
+                <a:spcPct val="112000"/>
+              </a:lnSpc>
+            </a:pPr>
+            <a:r>
+              <a:rPr sz="950" b="1" i="0">
+                <a:solidFill>
+                  <a:srgbClr val="12A150"/>
+                </a:solidFill>
+                <a:latin typeface="Segoe UI"/>
+              </a:rPr>
+              <a:t>✓</a:t>
+            </a:r>
+          </a:p>
+        </p:txBody>
+      </p:sp>
+      <p:sp>
+        <p:nvSpPr>
+          <p:cNvPr id="97" name="TextBox 96"/>
+          <p:cNvSpPr txBox="1"/>
+          <p:nvPr/>
+        </p:nvSpPr>
+        <p:spPr>
+          <a:xfrm>
+            <a:off x="676656" y="6227064"/>
+            <a:ext cx="3090672" cy="365760"/>
+          </a:xfrm>
+          <a:prstGeom prst="rect">
+            <a:avLst/>
+          </a:prstGeom>
+          <a:noFill/>
+        </p:spPr>
+        <p:txBody>
+          <a:bodyPr wrap="square" lIns="0" rIns="0" tIns="0" bIns="0" anchor="ctr">
+            <a:spAutoFit/>
+          </a:bodyPr>
+          <a:lstStyle/>
+          <a:p>
+            <a:pPr algn="l">
+              <a:lnSpc>
+                <a:spcPct val="115000"/>
+              </a:lnSpc>
+            </a:pPr>
+            <a:r>
+              <a:rPr sz="950" b="0" i="0">
+                <a:solidFill>
+                  <a:srgbClr val="1A1E2C"/>
+                </a:solidFill>
+                <a:latin typeface="Segoe UI"/>
+              </a:rPr>
+              <a:t>Ticking off the spinach it used needs nobody — it just says it did.</a:t>
+            </a:r>
+          </a:p>
+        </p:txBody>
+      </p:sp>
+      <p:sp>
+        <p:nvSpPr>
+          <p:cNvPr id="98" name="Freeform 97"/>
+          <p:cNvSpPr/>
+          <p:nvPr/>
+        </p:nvSpPr>
+        <p:spPr>
+          <a:xfrm>
+            <a:off x="4005072" y="5797296"/>
+            <a:ext cx="493776" cy="128016"/>
           </a:xfrm>
           <a:custGeom>
             <a:avLst/>
@@ -6799,27 +7415,27 @@
             <a:cxnLst/>
             <a:rect l="l" t="t" r="r" b="b"/>
             <a:pathLst>
-              <a:path w="185928" h="128016">
+              <a:path w="493776" h="128016">
                 <a:moveTo>
-                  <a:pt x="185928" y="45720"/>
+                  <a:pt x="0" y="45720"/>
                 </a:moveTo>
                 <a:lnTo>
-                  <a:pt x="100584" y="45720"/>
-                </a:lnTo>
-                <a:lnTo>
-                  <a:pt x="100584" y="0"/>
-                </a:lnTo>
-                <a:lnTo>
-                  <a:pt x="0" y="64008"/>
-                </a:lnTo>
-                <a:lnTo>
-                  <a:pt x="100584" y="128016"/>
-                </a:lnTo>
-                <a:lnTo>
-                  <a:pt x="100584" y="82296"/>
-                </a:lnTo>
-                <a:lnTo>
-                  <a:pt x="185928" y="82296"/>
+                  <a:pt x="393192" y="45720"/>
+                </a:lnTo>
+                <a:lnTo>
+                  <a:pt x="393192" y="0"/>
+                </a:lnTo>
+                <a:lnTo>
+                  <a:pt x="493776" y="64008"/>
+                </a:lnTo>
+                <a:lnTo>
+                  <a:pt x="393192" y="128016"/>
+                </a:lnTo>
+                <a:lnTo>
+                  <a:pt x="393192" y="82296"/>
+                </a:lnTo>
+                <a:lnTo>
+                  <a:pt x="0" y="82296"/>
                 </a:lnTo>
                 <a:close/>
               </a:path>
@@ -6857,14 +7473,14 @@
       </p:sp>
       <p:sp>
         <p:nvSpPr>
-          <p:cNvPr id="85" name="Rounded Rectangle 84"/>
+          <p:cNvPr id="99" name="Rounded Rectangle 98"/>
           <p:cNvSpPr/>
           <p:nvPr/>
         </p:nvSpPr>
         <p:spPr>
           <a:xfrm>
-            <a:off x="438912" y="4535424"/>
-            <a:ext cx="2633472" cy="822960"/>
+            <a:off x="4535424" y="5449824"/>
+            <a:ext cx="3108960" cy="822960"/>
           </a:xfrm>
           <a:prstGeom prst="roundRect">
             <a:avLst>
@@ -6905,13 +7521,13 @@
       </p:sp>
       <p:sp>
         <p:nvSpPr>
-          <p:cNvPr id="86" name="Oval 85"/>
+          <p:cNvPr id="100" name="Oval 99"/>
           <p:cNvSpPr/>
           <p:nvPr/>
         </p:nvSpPr>
         <p:spPr>
           <a:xfrm>
-            <a:off x="699516" y="4818888"/>
+            <a:off x="4777740" y="5733288"/>
             <a:ext cx="100584" cy="100584"/>
           </a:xfrm>
           <a:prstGeom prst="ellipse">
@@ -6949,13 +7565,13 @@
       </p:sp>
       <p:sp>
         <p:nvSpPr>
-          <p:cNvPr id="87" name="Freeform 86"/>
+          <p:cNvPr id="101" name="Freeform 100"/>
           <p:cNvSpPr/>
           <p:nvPr/>
         </p:nvSpPr>
         <p:spPr>
           <a:xfrm>
-            <a:off x="658368" y="4956048"/>
+            <a:off x="4736592" y="5870448"/>
             <a:ext cx="182880" cy="91440"/>
           </a:xfrm>
           <a:custGeom>
@@ -7053,14 +7669,14 @@
       </p:sp>
       <p:sp>
         <p:nvSpPr>
-          <p:cNvPr id="88" name="TextBox 87"/>
+          <p:cNvPr id="102" name="TextBox 101"/>
           <p:cNvSpPr txBox="1"/>
           <p:nvPr/>
         </p:nvSpPr>
         <p:spPr>
           <a:xfrm>
-            <a:off x="950976" y="4535424"/>
-            <a:ext cx="1975104" cy="822960"/>
+            <a:off x="5029200" y="5449824"/>
+            <a:ext cx="2487168" cy="822960"/>
           </a:xfrm>
           <a:prstGeom prst="rect">
             <a:avLst/>
@@ -7079,7 +7695,7 @@
               </a:lnSpc>
             </a:pPr>
             <a:r>
-              <a:rPr sz="1300" b="1" i="0">
+              <a:rPr sz="1200" b="1" i="0">
                 <a:solidFill>
                   <a:srgbClr val="1A1E2C"/>
                 </a:solidFill>
@@ -7095,7 +7711,7 @@
               </a:lnSpc>
             </a:pPr>
             <a:r>
-              <a:rPr sz="1050" b="0" i="0">
+              <a:rPr sz="1000" b="0" i="0">
                 <a:solidFill>
                   <a:srgbClr val="5C6377"/>
                 </a:solidFill>
@@ -7108,19 +7724,19 @@
       </p:sp>
       <p:cxnSp>
         <p:nvCxnSpPr>
-          <p:cNvPr id="89" name="Connector 88"/>
+          <p:cNvPr id="103" name="Connector 102"/>
           <p:cNvCxnSpPr/>
           <p:nvPr/>
         </p:nvCxnSpPr>
         <p:spPr>
           <a:xfrm>
-            <a:off x="1280160" y="5385816"/>
-            <a:ext cx="0" cy="576072"/>
+            <a:off x="7680960" y="5861304"/>
+            <a:ext cx="411480" cy="0"/>
           </a:xfrm>
           <a:prstGeom prst="line">
             <a:avLst/>
           </a:prstGeom>
-          <a:ln w="25400">
+          <a:ln w="27940">
             <a:solidFill>
               <a:srgbClr val="3F6FE8"/>
             </a:solidFill>
@@ -7145,14 +7761,14 @@
       </p:cxnSp>
       <p:sp>
         <p:nvSpPr>
-          <p:cNvPr id="90" name="Freeform 89"/>
+          <p:cNvPr id="104" name="Freeform 103"/>
           <p:cNvSpPr/>
           <p:nvPr/>
         </p:nvSpPr>
         <p:spPr>
           <a:xfrm>
-            <a:off x="1216152" y="5952744"/>
-            <a:ext cx="128016" cy="100584"/>
+            <a:off x="8092440" y="5797296"/>
+            <a:ext cx="100584" cy="128016"/>
           </a:xfrm>
           <a:custGeom>
             <a:avLst/>
@@ -7161,27 +7777,15 @@
             <a:cxnLst/>
             <a:rect l="l" t="t" r="r" b="b"/>
             <a:pathLst>
-              <a:path w="128016" h="100584">
+              <a:path w="100584" h="128016">
                 <a:moveTo>
-                  <a:pt x="45720" y="9144"/>
+                  <a:pt x="0" y="0"/>
                 </a:moveTo>
                 <a:lnTo>
-                  <a:pt x="45720" y="0"/>
-                </a:lnTo>
-                <a:lnTo>
-                  <a:pt x="0" y="0"/>
-                </a:lnTo>
-                <a:lnTo>
-                  <a:pt x="64008" y="100584"/>
-                </a:lnTo>
-                <a:lnTo>
-                  <a:pt x="128016" y="0"/>
-                </a:lnTo>
-                <a:lnTo>
-                  <a:pt x="82296" y="0"/>
-                </a:lnTo>
-                <a:lnTo>
-                  <a:pt x="82296" y="9144"/>
+                  <a:pt x="100584" y="64008"/>
+                </a:lnTo>
+                <a:lnTo>
+                  <a:pt x="0" y="128016"/>
                 </a:lnTo>
                 <a:close/>
               </a:path>
@@ -7217,21 +7821,26 @@
           </a:p>
         </p:txBody>
       </p:sp>
-      <p:cxnSp>
-        <p:nvCxnSpPr>
-          <p:cNvPr id="91" name="Connector 90"/>
-          <p:cNvCxnSpPr/>
-          <p:nvPr/>
-        </p:nvCxnSpPr>
-        <p:spPr>
-          <a:xfrm flipV="1">
-            <a:off x="2231136" y="5468112"/>
-            <a:ext cx="0" cy="576072"/>
-          </a:xfrm>
-          <a:prstGeom prst="line">
-            <a:avLst/>
-          </a:prstGeom>
-          <a:ln w="25400">
+      <p:sp>
+        <p:nvSpPr>
+          <p:cNvPr id="105" name="Rounded Rectangle 104"/>
+          <p:cNvSpPr/>
+          <p:nvPr/>
+        </p:nvSpPr>
+        <p:spPr>
+          <a:xfrm>
+            <a:off x="8211312" y="5065776"/>
+            <a:ext cx="3657600" cy="1591056"/>
+          </a:xfrm>
+          <a:prstGeom prst="roundRect">
+            <a:avLst>
+              <a:gd name="adj" fmla="val 5747"/>
+            </a:avLst>
+          </a:prstGeom>
+          <a:solidFill>
+            <a:srgbClr val="FFFFFF"/>
+          </a:solidFill>
+          <a:ln w="17780">
             <a:solidFill>
               <a:srgbClr val="3F6FE8"/>
             </a:solidFill>
@@ -7240,64 +7849,41 @@
           <a:effectLst/>
         </p:spPr>
         <p:style>
-          <a:lnRef idx="2">
+          <a:lnRef idx="1">
             <a:schemeClr val="accent1"/>
           </a:lnRef>
-          <a:fillRef idx="0">
+          <a:fillRef idx="3">
             <a:schemeClr val="accent1"/>
           </a:fillRef>
-          <a:effectRef idx="1">
+          <a:effectRef idx="2">
             <a:schemeClr val="accent1"/>
           </a:effectRef>
           <a:fontRef idx="minor">
-            <a:schemeClr val="tx1"/>
+            <a:schemeClr val="lt1"/>
           </a:fontRef>
         </p:style>
-      </p:cxnSp>
-      <p:sp>
-        <p:nvSpPr>
-          <p:cNvPr id="92" name="Freeform 91"/>
+        <p:txBody>
+          <a:bodyPr rtlCol="0" anchor="ctr"/>
+          <a:lstStyle/>
+          <a:p>
+            <a:pPr algn="ctr"/>
+          </a:p>
+        </p:txBody>
+      </p:sp>
+      <p:sp>
+        <p:nvSpPr>
+          <p:cNvPr id="106" name="Oval 105"/>
           <p:cNvSpPr/>
           <p:nvPr/>
         </p:nvSpPr>
         <p:spPr>
           <a:xfrm>
-            <a:off x="2167128" y="5376672"/>
-            <a:ext cx="128016" cy="100584"/>
-          </a:xfrm>
-          <a:custGeom>
-            <a:avLst/>
-            <a:gdLst/>
-            <a:ahLst/>
-            <a:cxnLst/>
-            <a:rect l="l" t="t" r="r" b="b"/>
-            <a:pathLst>
-              <a:path w="128016" h="100584">
-                <a:moveTo>
-                  <a:pt x="45720" y="91440"/>
-                </a:moveTo>
-                <a:lnTo>
-                  <a:pt x="45720" y="100584"/>
-                </a:lnTo>
-                <a:lnTo>
-                  <a:pt x="0" y="100584"/>
-                </a:lnTo>
-                <a:lnTo>
-                  <a:pt x="64008" y="0"/>
-                </a:lnTo>
-                <a:lnTo>
-                  <a:pt x="128016" y="100584"/>
-                </a:lnTo>
-                <a:lnTo>
-                  <a:pt x="82296" y="100584"/>
-                </a:lnTo>
-                <a:lnTo>
-                  <a:pt x="82296" y="91440"/>
-                </a:lnTo>
-                <a:close/>
-              </a:path>
-            </a:pathLst>
-          </a:custGeom>
+            <a:off x="8357616" y="5175504"/>
+            <a:ext cx="237744" cy="237744"/>
+          </a:xfrm>
+          <a:prstGeom prst="ellipse">
+            <a:avLst/>
+          </a:prstGeom>
           <a:solidFill>
             <a:srgbClr val="3F6FE8"/>
           </a:solidFill>
@@ -7330,105 +7916,13 @@
       </p:sp>
       <p:sp>
         <p:nvSpPr>
-          <p:cNvPr id="93" name="Rounded Rectangle 92"/>
-          <p:cNvSpPr/>
-          <p:nvPr/>
-        </p:nvSpPr>
-        <p:spPr>
-          <a:xfrm>
-            <a:off x="438912" y="6071616"/>
-            <a:ext cx="11311128" cy="585216"/>
-          </a:xfrm>
-          <a:prstGeom prst="roundRect">
-            <a:avLst>
-              <a:gd name="adj" fmla="val 15625"/>
-            </a:avLst>
-          </a:prstGeom>
-          <a:solidFill>
-            <a:srgbClr val="FFFFFF"/>
-          </a:solidFill>
-          <a:ln w="13970">
-            <a:solidFill>
-              <a:srgbClr val="868FA6"/>
-            </a:solidFill>
-          </a:ln>
-          <a:effectLst/>
-        </p:spPr>
-        <p:style>
-          <a:lnRef idx="1">
-            <a:schemeClr val="accent1"/>
-          </a:lnRef>
-          <a:fillRef idx="3">
-            <a:schemeClr val="accent1"/>
-          </a:fillRef>
-          <a:effectRef idx="2">
-            <a:schemeClr val="accent1"/>
-          </a:effectRef>
-          <a:fontRef idx="minor">
-            <a:schemeClr val="lt1"/>
-          </a:fontRef>
-        </p:style>
-        <p:txBody>
-          <a:bodyPr rtlCol="0" anchor="ctr"/>
-          <a:lstStyle/>
-          <a:p>
-            <a:pPr algn="ctr"/>
-          </a:p>
-        </p:txBody>
-      </p:sp>
-      <p:sp>
-        <p:nvSpPr>
-          <p:cNvPr id="94" name="Oval 93"/>
-          <p:cNvSpPr/>
-          <p:nvPr/>
-        </p:nvSpPr>
-        <p:spPr>
-          <a:xfrm>
-            <a:off x="603504" y="6245352"/>
-            <a:ext cx="237744" cy="237744"/>
-          </a:xfrm>
-          <a:prstGeom prst="ellipse">
-            <a:avLst/>
-          </a:prstGeom>
-          <a:solidFill>
-            <a:srgbClr val="3F6FE8"/>
-          </a:solidFill>
-          <a:ln>
-            <a:noFill/>
-          </a:ln>
-          <a:effectLst/>
-        </p:spPr>
-        <p:style>
-          <a:lnRef idx="1">
-            <a:schemeClr val="accent1"/>
-          </a:lnRef>
-          <a:fillRef idx="3">
-            <a:schemeClr val="accent1"/>
-          </a:fillRef>
-          <a:effectRef idx="2">
-            <a:schemeClr val="accent1"/>
-          </a:effectRef>
-          <a:fontRef idx="minor">
-            <a:schemeClr val="lt1"/>
-          </a:fontRef>
-        </p:style>
-        <p:txBody>
-          <a:bodyPr rtlCol="0" anchor="ctr"/>
-          <a:lstStyle/>
-          <a:p>
-            <a:pPr algn="ctr"/>
-          </a:p>
-        </p:txBody>
-      </p:sp>
-      <p:sp>
-        <p:nvSpPr>
-          <p:cNvPr id="95" name="TextBox 94"/>
+          <p:cNvPr id="107" name="TextBox 106"/>
           <p:cNvSpPr txBox="1"/>
           <p:nvPr/>
         </p:nvSpPr>
         <p:spPr>
           <a:xfrm>
-            <a:off x="603504" y="6245352"/>
+            <a:off x="8357616" y="5175504"/>
             <a:ext cx="237744" cy="237744"/>
           </a:xfrm>
           <a:prstGeom prst="rect">
@@ -7461,14 +7955,14 @@
       </p:sp>
       <p:sp>
         <p:nvSpPr>
-          <p:cNvPr id="96" name="TextBox 95"/>
+          <p:cNvPr id="108" name="TextBox 107"/>
           <p:cNvSpPr txBox="1"/>
           <p:nvPr/>
         </p:nvSpPr>
         <p:spPr>
           <a:xfrm>
-            <a:off x="932688" y="6071616"/>
-            <a:ext cx="1828800" cy="585216"/>
+            <a:off x="8686800" y="5175504"/>
+            <a:ext cx="3035808" cy="237744"/>
           </a:xfrm>
           <a:prstGeom prst="rect">
             <a:avLst/>
@@ -7487,7 +7981,7 @@
               </a:lnSpc>
             </a:pPr>
             <a:r>
-              <a:rPr sz="1300" b="1" i="0">
+              <a:rPr sz="1250" b="1" i="0">
                 <a:solidFill>
                   <a:srgbClr val="1A1E2C"/>
                 </a:solidFill>
@@ -7500,14 +7994,14 @@
       </p:sp>
       <p:sp>
         <p:nvSpPr>
-          <p:cNvPr id="97" name="Rounded Rectangle 96"/>
+          <p:cNvPr id="109" name="Rounded Rectangle 108"/>
           <p:cNvSpPr/>
           <p:nvPr/>
         </p:nvSpPr>
         <p:spPr>
           <a:xfrm>
-            <a:off x="2852928" y="6236208"/>
-            <a:ext cx="1874520" cy="256032"/>
+            <a:off x="10076688" y="5184648"/>
+            <a:ext cx="1664208" cy="219456"/>
           </a:xfrm>
           <a:prstGeom prst="roundRect">
             <a:avLst>
@@ -7546,14 +8040,14 @@
       </p:sp>
       <p:sp>
         <p:nvSpPr>
-          <p:cNvPr id="98" name="TextBox 97"/>
+          <p:cNvPr id="110" name="TextBox 109"/>
           <p:cNvSpPr txBox="1"/>
           <p:nvPr/>
         </p:nvSpPr>
         <p:spPr>
           <a:xfrm>
-            <a:off x="2852928" y="6236208"/>
-            <a:ext cx="1874520" cy="256032"/>
+            <a:off x="10076688" y="5184648"/>
+            <a:ext cx="1664208" cy="219456"/>
           </a:xfrm>
           <a:prstGeom prst="rect">
             <a:avLst/>
@@ -7569,6 +8063,45 @@
             <a:pPr algn="ctr">
               <a:lnSpc>
                 <a:spcPct val="112000"/>
+              </a:lnSpc>
+            </a:pPr>
+            <a:r>
+              <a:rPr sz="950" b="0" i="0">
+                <a:solidFill>
+                  <a:srgbClr val="5C6377"/>
+                </a:solidFill>
+                <a:latin typeface="Segoe UI"/>
+              </a:rPr>
+              <a:t>Later, when a day passes</a:t>
+            </a:r>
+          </a:p>
+        </p:txBody>
+      </p:sp>
+      <p:sp>
+        <p:nvSpPr>
+          <p:cNvPr id="111" name="TextBox 110"/>
+          <p:cNvSpPr txBox="1"/>
+          <p:nvPr/>
+        </p:nvSpPr>
+        <p:spPr>
+          <a:xfrm>
+            <a:off x="8357616" y="5468112"/>
+            <a:ext cx="3364992" cy="310896"/>
+          </a:xfrm>
+          <a:prstGeom prst="rect">
+            <a:avLst/>
+          </a:prstGeom>
+          <a:noFill/>
+        </p:spPr>
+        <p:txBody>
+          <a:bodyPr wrap="square" lIns="0" rIns="0" tIns="0" bIns="0" anchor="t">
+            <a:spAutoFit/>
+          </a:bodyPr>
+          <a:lstStyle/>
+          <a:p>
+            <a:pPr algn="l">
+              <a:lnSpc>
+                <a:spcPct val="115000"/>
               </a:lnSpc>
             </a:pPr>
             <a:r>
@@ -7578,96 +8111,21 @@
                 </a:solidFill>
                 <a:latin typeface="Segoe UI"/>
               </a:rPr>
-              <a:t>Later, when a day passes</a:t>
-            </a:r>
-          </a:p>
-        </p:txBody>
-      </p:sp>
-      <p:sp>
-        <p:nvSpPr>
-          <p:cNvPr id="99" name="TextBox 98"/>
-          <p:cNvSpPr txBox="1"/>
-          <p:nvPr/>
-        </p:nvSpPr>
-        <p:spPr>
-          <a:xfrm>
-            <a:off x="5010912" y="6071616"/>
-            <a:ext cx="2926080" cy="585216"/>
-          </a:xfrm>
-          <a:prstGeom prst="rect">
-            <a:avLst/>
-          </a:prstGeom>
-          <a:noFill/>
-        </p:spPr>
-        <p:txBody>
-          <a:bodyPr wrap="square" lIns="0" rIns="0" tIns="0" bIns="0" anchor="ctr">
-            <a:spAutoFit/>
-          </a:bodyPr>
-          <a:lstStyle/>
-          <a:p>
-            <a:pPr algn="l">
-              <a:lnSpc>
-                <a:spcPct val="112000"/>
-              </a:lnSpc>
-            </a:pPr>
-            <a:r>
-              <a:rPr sz="1100" b="0" i="0">
-                <a:solidFill>
-                  <a:srgbClr val="5C6377"/>
-                </a:solidFill>
-                <a:latin typeface="Segoe UI"/>
-              </a:rPr>
-              <a:t>Keep watching after the plan is made.</a:t>
-            </a:r>
-          </a:p>
-        </p:txBody>
-      </p:sp>
-      <p:cxnSp>
-        <p:nvCxnSpPr>
-          <p:cNvPr id="100" name="Connector 99"/>
-          <p:cNvCxnSpPr/>
-          <p:nvPr/>
-        </p:nvCxnSpPr>
-        <p:spPr>
-          <a:xfrm>
-            <a:off x="8101584" y="6181344"/>
-            <a:ext cx="0" cy="365760"/>
-          </a:xfrm>
-          <a:prstGeom prst="line">
-            <a:avLst/>
-          </a:prstGeom>
-          <a:ln w="12700">
-            <a:solidFill>
-              <a:srgbClr val="E2E6F0"/>
-            </a:solidFill>
-          </a:ln>
-          <a:effectLst/>
-        </p:spPr>
-        <p:style>
-          <a:lnRef idx="2">
-            <a:schemeClr val="accent1"/>
-          </a:lnRef>
-          <a:fillRef idx="0">
-            <a:schemeClr val="accent1"/>
-          </a:fillRef>
-          <a:effectRef idx="1">
-            <a:schemeClr val="accent1"/>
-          </a:effectRef>
-          <a:fontRef idx="minor">
-            <a:schemeClr val="tx1"/>
-          </a:fontRef>
-        </p:style>
-      </p:cxnSp>
-      <p:sp>
-        <p:nvSpPr>
-          <p:cNvPr id="101" name="Rounded Rectangle 100"/>
+              <a:t>Keep the plan right afterwards.</a:t>
+            </a:r>
+          </a:p>
+        </p:txBody>
+      </p:sp>
+      <p:sp>
+        <p:nvSpPr>
+          <p:cNvPr id="112" name="Rounded Rectangle 111"/>
           <p:cNvSpPr/>
           <p:nvPr/>
         </p:nvSpPr>
         <p:spPr>
           <a:xfrm>
-            <a:off x="8229600" y="6181344"/>
-            <a:ext cx="3392424" cy="365760"/>
+            <a:off x="8321040" y="5815584"/>
+            <a:ext cx="3438144" cy="365760"/>
           </a:xfrm>
           <a:prstGeom prst="roundRect">
             <a:avLst>
@@ -7706,14 +8164,14 @@
       </p:sp>
       <p:sp>
         <p:nvSpPr>
-          <p:cNvPr id="102" name="TextBox 101"/>
+          <p:cNvPr id="113" name="TextBox 112"/>
           <p:cNvSpPr txBox="1"/>
           <p:nvPr/>
         </p:nvSpPr>
         <p:spPr>
           <a:xfrm>
-            <a:off x="8339328" y="6071616"/>
-            <a:ext cx="146304" cy="585216"/>
+            <a:off x="8412480" y="5815584"/>
+            <a:ext cx="128016" cy="365760"/>
           </a:xfrm>
           <a:prstGeom prst="rect">
             <a:avLst/>
@@ -7732,7 +8190,7 @@
               </a:lnSpc>
             </a:pPr>
             <a:r>
-              <a:rPr sz="1050" b="1" i="0">
+              <a:rPr sz="950" b="1" i="0">
                 <a:solidFill>
                   <a:srgbClr val="12A150"/>
                 </a:solidFill>
@@ -7745,14 +8203,99 @@
       </p:sp>
       <p:sp>
         <p:nvSpPr>
-          <p:cNvPr id="103" name="TextBox 102"/>
+          <p:cNvPr id="114" name="TextBox 113"/>
           <p:cNvSpPr txBox="1"/>
           <p:nvPr/>
         </p:nvSpPr>
         <p:spPr>
           <a:xfrm>
-            <a:off x="8503920" y="6071616"/>
-            <a:ext cx="3008376" cy="585216"/>
+            <a:off x="8577072" y="5815584"/>
+            <a:ext cx="3090672" cy="365760"/>
+          </a:xfrm>
+          <a:prstGeom prst="rect">
+            <a:avLst/>
+          </a:prstGeom>
+          <a:noFill/>
+        </p:spPr>
+        <p:txBody>
+          <a:bodyPr wrap="square" lIns="0" rIns="0" tIns="0" bIns="0" anchor="ctr">
+            <a:spAutoFit/>
+          </a:bodyPr>
+          <a:lstStyle/>
+          <a:p>
+            <a:pPr algn="l">
+              <a:lnSpc>
+                <a:spcPct val="115000"/>
+              </a:lnSpc>
+            </a:pPr>
+            <a:r>
+              <a:rPr sz="950" b="0" i="0">
+                <a:solidFill>
+                  <a:srgbClr val="1A1E2C"/>
+                </a:solidFill>
+                <a:latin typeface="Segoe UI"/>
+              </a:rPr>
+              <a:t>Fish is delivered — it moves the fish forward before it spoils.</a:t>
+            </a:r>
+          </a:p>
+        </p:txBody>
+      </p:sp>
+      <p:sp>
+        <p:nvSpPr>
+          <p:cNvPr id="115" name="Rounded Rectangle 114"/>
+          <p:cNvSpPr/>
+          <p:nvPr/>
+        </p:nvSpPr>
+        <p:spPr>
+          <a:xfrm>
+            <a:off x="8321040" y="6227064"/>
+            <a:ext cx="3438144" cy="365760"/>
+          </a:xfrm>
+          <a:prstGeom prst="roundRect">
+            <a:avLst>
+              <a:gd name="adj" fmla="val 20000"/>
+            </a:avLst>
+          </a:prstGeom>
+          <a:solidFill>
+            <a:srgbClr val="E7F7EE"/>
+          </a:solidFill>
+          <a:ln>
+            <a:noFill/>
+          </a:ln>
+          <a:effectLst/>
+        </p:spPr>
+        <p:style>
+          <a:lnRef idx="1">
+            <a:schemeClr val="accent1"/>
+          </a:lnRef>
+          <a:fillRef idx="3">
+            <a:schemeClr val="accent1"/>
+          </a:fillRef>
+          <a:effectRef idx="2">
+            <a:schemeClr val="accent1"/>
+          </a:effectRef>
+          <a:fontRef idx="minor">
+            <a:schemeClr val="lt1"/>
+          </a:fontRef>
+        </p:style>
+        <p:txBody>
+          <a:bodyPr rtlCol="0" anchor="ctr"/>
+          <a:lstStyle/>
+          <a:p>
+            <a:pPr algn="ctr"/>
+          </a:p>
+        </p:txBody>
+      </p:sp>
+      <p:sp>
+        <p:nvSpPr>
+          <p:cNvPr id="116" name="TextBox 115"/>
+          <p:cNvSpPr txBox="1"/>
+          <p:nvPr/>
+        </p:nvSpPr>
+        <p:spPr>
+          <a:xfrm>
+            <a:off x="8412480" y="6227064"/>
+            <a:ext cx="128016" cy="365760"/>
           </a:xfrm>
           <a:prstGeom prst="rect">
             <a:avLst/>
@@ -7771,13 +8314,52 @@
               </a:lnSpc>
             </a:pPr>
             <a:r>
-              <a:rPr sz="1050" b="0" i="0">
+              <a:rPr sz="950" b="1" i="0">
+                <a:solidFill>
+                  <a:srgbClr val="12A150"/>
+                </a:solidFill>
+                <a:latin typeface="Segoe UI"/>
+              </a:rPr>
+              <a:t>✓</a:t>
+            </a:r>
+          </a:p>
+        </p:txBody>
+      </p:sp>
+      <p:sp>
+        <p:nvSpPr>
+          <p:cNvPr id="117" name="TextBox 116"/>
+          <p:cNvSpPr txBox="1"/>
+          <p:nvPr/>
+        </p:nvSpPr>
+        <p:spPr>
+          <a:xfrm>
+            <a:off x="8577072" y="6227064"/>
+            <a:ext cx="3090672" cy="365760"/>
+          </a:xfrm>
+          <a:prstGeom prst="rect">
+            <a:avLst/>
+          </a:prstGeom>
+          <a:noFill/>
+        </p:spPr>
+        <p:txBody>
+          <a:bodyPr wrap="square" lIns="0" rIns="0" tIns="0" bIns="0" anchor="ctr">
+            <a:spAutoFit/>
+          </a:bodyPr>
+          <a:lstStyle/>
+          <a:p>
+            <a:pPr algn="l">
+              <a:lnSpc>
+                <a:spcPct val="115000"/>
+              </a:lnSpc>
+            </a:pPr>
+            <a:r>
+              <a:rPr sz="950" b="0" i="0">
                 <a:solidFill>
                   <a:srgbClr val="1A1E2C"/>
                 </a:solidFill>
                 <a:latin typeface="Segoe UI"/>
               </a:rPr>
-              <a:t>Fish arrived, so it changed the next dinner.</a:t>
+              <a:t>Someone has a heavy training day — it raises the protein that evening, and says both reasons.</a:t>
             </a:r>
           </a:p>
         </p:txBody>
